--- a/apresentacao/APRESENTACAO_AVALIACAO_ACESSIBILIDADE.pptx
+++ b/apresentacao/APRESENTACAO_AVALIACAO_ACESSIBILIDADE.pptx
@@ -14135,7 +14135,7 @@
               <a:rPr sz="1500">
                 <a:latin typeface="Arial"/>
               </a:rPr>
-              <a:t>6. Cor não e o único meio de transmitir informação — 1.4.1 (A): </a:t>
+              <a:t>6. Cor não é o único meio de transmitir informação — 1.4.1 (A): </a:t>
             </a:r>
             <a:r>
               <a:rPr sz="1500" b="1">
@@ -14330,7 +14330,7 @@
               <a:rPr sz="1500">
                 <a:latin typeface="Arial"/>
               </a:rPr>
-              <a:t>12. Identificacao e sugestao de correção de erros — 3.3.1 (A / AA): </a:t>
+              <a:t>12. Identificação e sugestão de correção de erros — 3.3.1 (A / AA): </a:t>
             </a:r>
             <a:r>
               <a:rPr sz="1500" b="1">

--- a/apresentacao/APRESENTACAO_AVALIACAO_ACESSIBILIDADE.pptx
+++ b/apresentacao/APRESENTACAO_AVALIACAO_ACESSIBILIDADE.pptx
@@ -19,6 +19,12 @@
     <p:sldId id="267" r:id="rId15"/>
     <p:sldId id="268" r:id="rId16"/>
     <p:sldId id="269" r:id="rId17"/>
+    <p:sldId id="270" r:id="rId18"/>
+    <p:sldId id="271" r:id="rId19"/>
+    <p:sldId id="272" r:id="rId20"/>
+    <p:sldId id="273" r:id="rId21"/>
+    <p:sldId id="274" r:id="rId22"/>
+    <p:sldId id="275" r:id="rId23"/>
   </p:sldIdLst>
   <p:sldSz cy="6858000" cx="12192000"/>
   <p:notesSz cx="6858000" cy="9144000"/>
@@ -12769,7 +12775,7 @@
               <a:rPr sz="2800">
                 <a:latin typeface="Arial"/>
               </a:rPr>
-              <a:t>Tarefa complementar: uso real com leitor de tela</a:t>
+              <a:t>Contraste medido na tela renderizada</a:t>
             </a:r>
           </a:p>
         </p:txBody>
@@ -12795,10 +12801,10 @@
               </a:spcAft>
             </a:pPr>
             <a:r>
-              <a:rPr sz="1700">
+              <a:rPr sz="1500">
                 <a:latin typeface="Arial"/>
               </a:rPr>
-              <a:t>Aparelho: [PREENCHER: modelo] — [PREENCHER: TalkBack / VoiceOver]</a:t>
+              <a:t>Método: o texto é apagado, a área é fotografada e a cor dominante da imagem vira o fundo — sem supor nada pela árvore do DOM.</a:t>
             </a:r>
           </a:p>
           <a:p>
@@ -12808,10 +12814,62 @@
               </a:spcAft>
             </a:pPr>
             <a:r>
-              <a:rPr sz="1700">
+              <a:rPr sz="1500">
                 <a:latin typeface="Arial"/>
               </a:rPr>
-              <a:t>Tarefa: Localizar, a partir da página inicial, o edital mais recente publicado pelo campus e abrir o documento correspondente.</a:t>
+              <a:t>Reprovações confirmadas:</a:t>
+            </a:r>
+          </a:p>
+          <a:p>
+            <a:pPr lvl="1">
+              <a:spcAft>
+                <a:spcPts val="600"/>
+              </a:spcAft>
+            </a:pPr>
+            <a:r>
+              <a:rPr sz="1200">
+                <a:latin typeface="Arial"/>
+              </a:rPr>
+              <a:t>1.66:1 (exige 4.5:1) — Botão de navegação do banner rotativo (slides 1, 3 e 4)</a:t>
+            </a:r>
+          </a:p>
+          <a:p>
+            <a:pPr lvl="1">
+              <a:spcAft>
+                <a:spcPts val="600"/>
+              </a:spcAft>
+            </a:pPr>
+            <a:r>
+              <a:rPr sz="1200">
+                <a:latin typeface="Arial"/>
+              </a:rPr>
+              <a:t>3.0:1 (exige 4.5:1) — Botão de navegação do banner rotativo (slide ativo)</a:t>
+            </a:r>
+          </a:p>
+          <a:p>
+            <a:pPr lvl="1">
+              <a:spcAft>
+                <a:spcPts val="600"/>
+              </a:spcAft>
+            </a:pPr>
+            <a:r>
+              <a:rPr sz="1200">
+                <a:latin typeface="Arial"/>
+              </a:rPr>
+              <a:t>4.48:1 (exige 4.5:1) — Link "Voltar para o topo"</a:t>
+            </a:r>
+          </a:p>
+          <a:p>
+            <a:pPr lvl="1">
+              <a:spcAft>
+                <a:spcPts val="600"/>
+              </a:spcAft>
+            </a:pPr>
+            <a:r>
+              <a:rPr sz="1200">
+                <a:latin typeface="Arial"/>
+              </a:rPr>
+              <a:t>4.0:1 (exige 4.5:1) — Barra do Governo Federal (barra.brasil.gov.br)</a:t>
             </a:r>
           </a:p>
           <a:p>
@@ -12821,36 +12879,10 @@
               </a:spcAft>
             </a:pPr>
             <a:r>
-              <a:rPr sz="1700">
+              <a:rPr sz="1500">
                 <a:latin typeface="Arial"/>
               </a:rPr>
-              <a:t>Concluída: [PREENCHER: Sim/Não] — tempo: [PREENCHER: ?]</a:t>
-            </a:r>
-          </a:p>
-          <a:p>
-            <a:pPr>
-              <a:spcAft>
-                <a:spcPts val="600"/>
-              </a:spcAft>
-            </a:pPr>
-            <a:r>
-              <a:rPr sz="1700">
-                <a:latin typeface="Arial"/>
-              </a:rPr>
-              <a:t>Relato:</a:t>
-            </a:r>
-          </a:p>
-          <a:p>
-            <a:pPr lvl="1">
-              <a:spcAft>
-                <a:spcPts val="600"/>
-              </a:spcAft>
-            </a:pPr>
-            <a:r>
-              <a:rPr sz="1400">
-                <a:latin typeface="Arial"/>
-              </a:rPr>
-              <a:t>[PREENCHER: resuma a experiência em 3 a 4 linhas]</a:t>
+              <a:t>Indicador de foco: 5.81:1 sobre o verde, mas 1.56:1 sobre o branco (exige 3.0:1)</a:t>
             </a:r>
           </a:p>
         </p:txBody>
@@ -12894,27 +12926,58 @@
               </a:spcAft>
             </a:pPr>
             <a:r>
-              <a:rPr sz="2800">
+              <a:rPr sz="2600">
                 <a:latin typeface="Arial"/>
               </a:rPr>
-              <a:t>Nível de conformidade WCAG 2.1</a:t>
+              <a:t>Barra de acessibilidade do portal</a:t>
             </a:r>
           </a:p>
         </p:txBody>
       </p:sp>
+      <p:pic>
+        <p:nvPicPr>
+          <p:cNvPr id="3" name="Picture 2" descr="02-topo-barra-acessibilidade.png"/>
+          <p:cNvPicPr>
+            <a:picLocks noChangeAspect="1"/>
+          </p:cNvPicPr>
+          <p:nvPr/>
+        </p:nvPicPr>
+        <p:blipFill>
+          <a:blip r:embed="rId2"/>
+          <a:stretch>
+            <a:fillRect/>
+          </a:stretch>
+        </p:blipFill>
+        <p:spPr>
+          <a:xfrm>
+            <a:off x="853440" y="1371600"/>
+            <a:ext cx="10485120" cy="2763281"/>
+          </a:xfrm>
+          <a:prstGeom prst="rect">
+            <a:avLst/>
+          </a:prstGeom>
+        </p:spPr>
+      </p:pic>
       <p:sp>
         <p:nvSpPr>
-          <p:cNvPr id="3" name="Content Placeholder 2"/>
-          <p:cNvSpPr>
-            <a:spLocks noGrp="1"/>
-          </p:cNvSpPr>
-          <p:nvPr>
-            <p:ph idx="1"/>
-          </p:nvPr>
+          <p:cNvPr id="4" name="TextBox 3"/>
+          <p:cNvSpPr txBox="1"/>
+          <p:nvPr/>
         </p:nvSpPr>
-        <p:spPr/>
+        <p:spPr>
+          <a:xfrm>
+            <a:off x="853440" y="4272041"/>
+            <a:ext cx="10485120" cy="822960"/>
+          </a:xfrm>
+          <a:prstGeom prst="rect">
+            <a:avLst/>
+          </a:prstGeom>
+          <a:noFill/>
+        </p:spPr>
         <p:txBody>
-          <a:bodyPr wrap="square"/>
+          <a:bodyPr wrap="square">
+            <a:spAutoFit/>
+          </a:bodyPr>
           <a:lstStyle/>
           <a:p>
             <a:pPr>
@@ -12923,75 +12986,10 @@
               </a:spcAft>
             </a:pPr>
             <a:r>
-              <a:rPr sz="1700">
-                <a:latin typeface="Arial"/>
-              </a:rPr>
-              <a:t>Regra do W3C: a conformidade é integral — uma única falha de Nível A</a:t>
-            </a:r>
-          </a:p>
-          <a:p>
-            <a:pPr lvl="1">
-              <a:spcAft>
-                <a:spcPts val="600"/>
-              </a:spcAft>
-            </a:pPr>
-            <a:r>
               <a:rPr sz="1400">
                 <a:latin typeface="Arial"/>
               </a:rPr>
-              <a:t>impede a conformidade em qualquer nível</a:t>
-            </a:r>
-          </a:p>
-          <a:p>
-            <a:pPr>
-              <a:spcAft>
-                <a:spcPts val="600"/>
-              </a:spcAft>
-            </a:pPr>
-            <a:r>
-              <a:rPr sz="1700">
-                <a:latin typeface="Arial"/>
-              </a:rPr>
-              <a:t>Falhas em critérios de Nível A: [PREENCHER: ?]</a:t>
-            </a:r>
-          </a:p>
-          <a:p>
-            <a:pPr>
-              <a:spcAft>
-                <a:spcPts val="600"/>
-              </a:spcAft>
-            </a:pPr>
-            <a:r>
-              <a:rPr sz="1700">
-                <a:latin typeface="Arial"/>
-              </a:rPr>
-              <a:t>Falhas em critérios de Nível AA: [PREENCHER: ?]</a:t>
-            </a:r>
-          </a:p>
-          <a:p>
-            <a:pPr>
-              <a:spcAft>
-                <a:spcPts val="600"/>
-              </a:spcAft>
-            </a:pPr>
-            <a:r>
-              <a:rPr sz="1700">
-                <a:latin typeface="Arial"/>
-              </a:rPr>
-              <a:t>Resultado: [PREENCHER: Não conforme / A / AA / AAA]</a:t>
-            </a:r>
-          </a:p>
-          <a:p>
-            <a:pPr>
-              <a:spcAft>
-                <a:spcPts val="600"/>
-              </a:spcAft>
-            </a:pPr>
-            <a:r>
-              <a:rPr sz="1700">
-                <a:latin typeface="Arial"/>
-              </a:rPr>
-              <a:t>Nível AA é o patamar exigido da administração pública brasileira</a:t>
+              <a:t>Quatro atalhos de salto (Alt+1 a Alt+4), Alto Contraste e Mapa do site: o portal acerta o essencial da navegação assistida.</a:t>
             </a:r>
           </a:p>
         </p:txBody>
@@ -13035,27 +13033,58 @@
               </a:spcAft>
             </a:pPr>
             <a:r>
-              <a:rPr sz="2800">
+              <a:rPr sz="2600">
                 <a:latin typeface="Arial"/>
               </a:rPr>
-              <a:t>Recomendações priorizadas</a:t>
+              <a:t>Onde estão as piores falhas: o banner rotativo</a:t>
             </a:r>
           </a:p>
         </p:txBody>
       </p:sp>
+      <p:pic>
+        <p:nvPicPr>
+          <p:cNvPr id="3" name="Picture 2" descr="13-carrossel-banner-rotativo.png"/>
+          <p:cNvPicPr>
+            <a:picLocks noChangeAspect="1"/>
+          </p:cNvPicPr>
+          <p:nvPr/>
+        </p:nvPicPr>
+        <p:blipFill>
+          <a:blip r:embed="rId2"/>
+          <a:stretch>
+            <a:fillRect/>
+          </a:stretch>
+        </p:blipFill>
+        <p:spPr>
+          <a:xfrm>
+            <a:off x="3352800" y="1371600"/>
+            <a:ext cx="5486400" cy="4251960"/>
+          </a:xfrm>
+          <a:prstGeom prst="rect">
+            <a:avLst/>
+          </a:prstGeom>
+        </p:spPr>
+      </p:pic>
       <p:sp>
         <p:nvSpPr>
-          <p:cNvPr id="3" name="Content Placeholder 2"/>
-          <p:cNvSpPr>
-            <a:spLocks noGrp="1"/>
-          </p:cNvSpPr>
-          <p:nvPr>
-            <p:ph idx="1"/>
-          </p:nvPr>
+          <p:cNvPr id="4" name="TextBox 3"/>
+          <p:cNvSpPr txBox="1"/>
+          <p:nvPr/>
         </p:nvSpPr>
-        <p:spPr/>
+        <p:spPr>
+          <a:xfrm>
+            <a:off x="853440" y="5760720"/>
+            <a:ext cx="10485120" cy="822960"/>
+          </a:xfrm>
+          <a:prstGeom prst="rect">
+            <a:avLst/>
+          </a:prstGeom>
+          <a:noFill/>
+        </p:spPr>
         <p:txBody>
-          <a:bodyPr wrap="square"/>
+          <a:bodyPr wrap="square">
+            <a:spAutoFit/>
+          </a:bodyPr>
           <a:lstStyle/>
           <a:p>
             <a:pPr>
@@ -13064,101 +13093,10 @@
               </a:spcAft>
             </a:pPr>
             <a:r>
-              <a:rPr sz="1500">
+              <a:rPr sz="1400">
                 <a:latin typeface="Arial"/>
               </a:rPr>
-              <a:t>[Crítica] Imagens sem texto alternativo → WCAG 1.1.1 (A)</a:t>
-            </a:r>
-          </a:p>
-          <a:p>
-            <a:pPr>
-              <a:spcAft>
-                <a:spcPts val="600"/>
-              </a:spcAft>
-            </a:pPr>
-            <a:r>
-              <a:rPr sz="1500">
-                <a:latin typeface="Arial"/>
-              </a:rPr>
-              <a:t>[Crítica] Campos de formulário sem rótulo → WCAG 3.3.2 / 4.1.2 (A)</a:t>
-            </a:r>
-          </a:p>
-          <a:p>
-            <a:pPr>
-              <a:spcAft>
-                <a:spcPts val="600"/>
-              </a:spcAft>
-            </a:pPr>
-            <a:r>
-              <a:rPr sz="1500">
-                <a:latin typeface="Arial"/>
-              </a:rPr>
-              <a:t>[Crítica] Hierarquia de cabeçalhos incorreta → WCAG 1.3.1 (A)</a:t>
-            </a:r>
-          </a:p>
-          <a:p>
-            <a:pPr>
-              <a:spcAft>
-                <a:spcPts val="600"/>
-              </a:spcAft>
-            </a:pPr>
-            <a:r>
-              <a:rPr sz="1500">
-                <a:latin typeface="Arial"/>
-              </a:rPr>
-              <a:t>[Alta] Ausência de regiões semânticas → WCAG 1.3.1 (A)</a:t>
-            </a:r>
-          </a:p>
-          <a:p>
-            <a:pPr>
-              <a:spcAft>
-                <a:spcPts val="600"/>
-              </a:spcAft>
-            </a:pPr>
-            <a:r>
-              <a:rPr sz="1500">
-                <a:latin typeface="Arial"/>
-              </a:rPr>
-              <a:t>[Alta] Links com texto não descritivo → WCAG 2.4.4 (A)</a:t>
-            </a:r>
-          </a:p>
-          <a:p>
-            <a:pPr>
-              <a:spcAft>
-                <a:spcPts val="600"/>
-              </a:spcAft>
-            </a:pPr>
-            <a:r>
-              <a:rPr sz="1500">
-                <a:latin typeface="Arial"/>
-              </a:rPr>
-              <a:t>[Alta] Contraste insuficiente → WCAG 1.4.3 / 1.4.11 (AA)</a:t>
-            </a:r>
-          </a:p>
-          <a:p>
-            <a:pPr>
-              <a:spcAft>
-                <a:spcPts val="600"/>
-              </a:spcAft>
-            </a:pPr>
-            <a:r>
-              <a:rPr sz="1500">
-                <a:latin typeface="Arial"/>
-              </a:rPr>
-              <a:t>[Media] Foco de teclado não visível → WCAG 2.4.7 (AA)</a:t>
-            </a:r>
-          </a:p>
-          <a:p>
-            <a:pPr>
-              <a:spcAft>
-                <a:spcPts val="600"/>
-              </a:spcAft>
-            </a:pPr>
-            <a:r>
-              <a:rPr sz="1500">
-                <a:latin typeface="Arial"/>
-              </a:rPr>
-              <a:t>[Media] Ausência de link de salto → WCAG 2.4.1 (A)</a:t>
+              <a:t>Botões de 22x20 px, contraste de 1,66:1, slide ativo marcado só pela cor e troca automática a cada 4 segundos sem botão de pausa.</a:t>
             </a:r>
           </a:p>
         </p:txBody>
@@ -13202,27 +13140,58 @@
               </a:spcAft>
             </a:pPr>
             <a:r>
-              <a:rPr sz="2800">
+              <a:rPr sz="2600">
                 <a:latin typeface="Arial"/>
               </a:rPr>
-              <a:t>Conclusão</a:t>
+              <a:t>Reflow em 320 px</a:t>
             </a:r>
           </a:p>
         </p:txBody>
       </p:sp>
+      <p:pic>
+        <p:nvPicPr>
+          <p:cNvPr id="3" name="Picture 2" descr="08-reflow-320px.png"/>
+          <p:cNvPicPr>
+            <a:picLocks noChangeAspect="1"/>
+          </p:cNvPicPr>
+          <p:nvPr/>
+        </p:nvPicPr>
+        <p:blipFill>
+          <a:blip r:embed="rId2"/>
+          <a:stretch>
+            <a:fillRect/>
+          </a:stretch>
+        </p:blipFill>
+        <p:spPr>
+          <a:xfrm>
+            <a:off x="5245608" y="1371600"/>
+            <a:ext cx="1700784" cy="4251960"/>
+          </a:xfrm>
+          <a:prstGeom prst="rect">
+            <a:avLst/>
+          </a:prstGeom>
+        </p:spPr>
+      </p:pic>
       <p:sp>
         <p:nvSpPr>
-          <p:cNvPr id="3" name="Content Placeholder 2"/>
-          <p:cNvSpPr>
-            <a:spLocks noGrp="1"/>
-          </p:cNvSpPr>
-          <p:nvPr>
-            <p:ph idx="1"/>
-          </p:nvPr>
+          <p:cNvPr id="4" name="TextBox 3"/>
+          <p:cNvSpPr txBox="1"/>
+          <p:nvPr/>
         </p:nvSpPr>
-        <p:spPr/>
+        <p:spPr>
+          <a:xfrm>
+            <a:off x="853440" y="5760720"/>
+            <a:ext cx="10485120" cy="822960"/>
+          </a:xfrm>
+          <a:prstGeom prst="rect">
+            <a:avLst/>
+          </a:prstGeom>
+          <a:noFill/>
+        </p:spPr>
         <p:txBody>
-          <a:bodyPr wrap="square"/>
+          <a:bodyPr wrap="square">
+            <a:spAutoFit/>
+          </a:bodyPr>
           <a:lstStyle/>
           <a:p>
             <a:pPr>
@@ -13231,88 +13200,10 @@
               </a:spcAft>
             </a:pPr>
             <a:r>
-              <a:rPr sz="1700">
-                <a:latin typeface="Arial"/>
-              </a:rPr>
-              <a:t>Boa aparência visual não significa boa acessibilidade:</a:t>
-            </a:r>
-          </a:p>
-          <a:p>
-            <a:pPr lvl="1">
-              <a:spcAft>
-                <a:spcPts val="600"/>
-              </a:spcAft>
-            </a:pPr>
-            <a:r>
               <a:rPr sz="1400">
                 <a:latin typeface="Arial"/>
               </a:rPr>
-              <a:t>as barreiras estão na camada de marcação, invisíveis ao usuário vidente</a:t>
-            </a:r>
-          </a:p>
-          <a:p>
-            <a:pPr>
-              <a:spcAft>
-                <a:spcPts val="600"/>
-              </a:spcAft>
-            </a:pPr>
-            <a:r>
-              <a:rPr sz="1700">
-                <a:latin typeface="Arial"/>
-              </a:rPr>
-              <a:t>Ferramentas automáticas quantificam; só o teste humano revela a experiência</a:t>
-            </a:r>
-          </a:p>
-          <a:p>
-            <a:pPr>
-              <a:spcAft>
-                <a:spcPts val="600"/>
-              </a:spcAft>
-            </a:pPr>
-            <a:r>
-              <a:rPr sz="1700">
-                <a:latin typeface="Arial"/>
-              </a:rPr>
-              <a:t>A maior parte das correções é de baixo custo — atributos alt, labels,</a:t>
-            </a:r>
-          </a:p>
-          <a:p>
-            <a:pPr lvl="1">
-              <a:spcAft>
-                <a:spcPts val="600"/>
-              </a:spcAft>
-            </a:pPr>
-            <a:r>
-              <a:rPr sz="1400">
-                <a:latin typeface="Arial"/>
-              </a:rPr>
-              <a:t>hierarquia de cabeçalhos e elementos semânticos de região</a:t>
-            </a:r>
-          </a:p>
-          <a:p>
-            <a:pPr>
-              <a:spcAft>
-                <a:spcPts val="600"/>
-              </a:spcAft>
-            </a:pPr>
-            <a:r>
-              <a:rPr sz="1700">
-                <a:latin typeface="Arial"/>
-              </a:rPr>
-              <a:t>Acessibilidade se projeta desde o início; corrigir depois custa mais</a:t>
-            </a:r>
-          </a:p>
-          <a:p>
-            <a:pPr>
-              <a:spcAft>
-                <a:spcPts val="600"/>
-              </a:spcAft>
-            </a:pPr>
-            <a:r>
-              <a:rPr sz="1700">
-                <a:latin typeface="Arial"/>
-              </a:rPr>
-              <a:t>Recomenda-se reavaliação periódica: cada publicação pode reintroduzir barreiras</a:t>
+              <a:t>O conteúdo ocupa 330 px em uma tela de 320 px e obriga a rolagem horizontal — WCAG 1.4.10 (AA).</a:t>
             </a:r>
           </a:p>
         </p:txBody>
@@ -13337,6 +13228,35 @@
       <p:grpSpPr/>
       <p:sp>
         <p:nvSpPr>
+          <p:cNvPr id="2" name="Title 1"/>
+          <p:cNvSpPr>
+            <a:spLocks noGrp="1"/>
+          </p:cNvSpPr>
+          <p:nvPr>
+            <p:ph type="title"/>
+          </p:nvPr>
+        </p:nvSpPr>
+        <p:spPr/>
+        <p:txBody>
+          <a:bodyPr wrap="square"/>
+          <a:lstStyle/>
+          <a:p>
+            <a:pPr>
+              <a:spcAft>
+                <a:spcPts val="0"/>
+              </a:spcAft>
+            </a:pPr>
+            <a:r>
+              <a:rPr sz="2800">
+                <a:latin typeface="Arial"/>
+              </a:rPr>
+              <a:t>Simulação automatizada em smartphone</a:t>
+            </a:r>
+          </a:p>
+        </p:txBody>
+      </p:sp>
+      <p:sp>
+        <p:nvSpPr>
           <p:cNvPr id="3" name="Content Placeholder 2"/>
           <p:cNvSpPr>
             <a:spLocks noGrp="1"/>
@@ -13356,10 +13276,10 @@
               </a:spcAft>
             </a:pPr>
             <a:r>
-              <a:rPr sz="5400">
+              <a:rPr sz="1600">
                 <a:latin typeface="Arial"/>
               </a:rPr>
-              <a:t>Obrigado!</a:t>
+              <a:t>Aparelho emulado: Google Pixel 7 (TalkBack) — 412×915 px</a:t>
             </a:r>
           </a:p>
           <a:p>
@@ -13369,10 +13289,845 @@
               </a:spcAft>
             </a:pPr>
             <a:r>
-              <a:rPr sz="5400">
+              <a:rPr sz="1600">
                 <a:latin typeface="Arial"/>
               </a:rPr>
-              <a:t>Perguntas?</a:t>
+              <a:t>Elementos anunciados SEM RÓTULO: 0  (WCAG 1.1.1 / 4.1.2 — A)</a:t>
+            </a:r>
+          </a:p>
+          <a:p>
+            <a:pPr>
+              <a:spcAft>
+                <a:spcPts val="600"/>
+              </a:spcAft>
+            </a:pPr>
+            <a:r>
+              <a:rPr sz="1600">
+                <a:latin typeface="Arial"/>
+              </a:rPr>
+              <a:t>Deslizes até o conteúdo principal: 4  (WCAG 2.4.1 — A)</a:t>
+            </a:r>
+          </a:p>
+          <a:p>
+            <a:pPr>
+              <a:spcAft>
+                <a:spcPts val="600"/>
+              </a:spcAft>
+            </a:pPr>
+            <a:r>
+              <a:rPr sz="1600">
+                <a:latin typeface="Arial"/>
+              </a:rPr>
+              <a:t>Sem indicador de foco visível: 0  (WCAG 2.4.7 — AA)</a:t>
+            </a:r>
+          </a:p>
+          <a:p>
+            <a:pPr>
+              <a:spcAft>
+                <a:spcPts val="600"/>
+              </a:spcAft>
+            </a:pPr>
+            <a:r>
+              <a:rPr sz="1600">
+                <a:latin typeface="Arial"/>
+              </a:rPr>
+              <a:t>Alvos de toque menores que 24×24 px: 23  (WCAG 2.5.8 — AA)</a:t>
+            </a:r>
+          </a:p>
+          <a:p>
+            <a:pPr>
+              <a:spcAft>
+                <a:spcPts val="600"/>
+              </a:spcAft>
+            </a:pPr>
+            <a:r>
+              <a:rPr sz="1600">
+                <a:latin typeface="Arial"/>
+              </a:rPr>
+              <a:t>Rolagem horizontal em 320 px: sim  (WCAG 1.4.10 — AA)</a:t>
+            </a:r>
+          </a:p>
+          <a:p>
+            <a:pPr>
+              <a:spcAft>
+                <a:spcPts val="600"/>
+              </a:spcAft>
+            </a:pPr>
+            <a:r>
+              <a:rPr sz="1600">
+                <a:latin typeface="Arial"/>
+              </a:rPr>
+              <a:t>Contraste reprovado em 7 de 51 trechos — pior razão 1:1  (WCAG 1.4.3 — AA)</a:t>
+            </a:r>
+          </a:p>
+        </p:txBody>
+      </p:sp>
+    </p:spTree>
+  </p:cSld>
+  <p:clrMapOvr>
+    <a:masterClrMapping/>
+  </p:clrMapOvr>
+</p:sld>
+</file>
+
+<file path=ppt/slides/slide15.xml><?xml version="1.0" encoding="utf-8"?>
+<p:sld xmlns:a="http://schemas.openxmlformats.org/drawingml/2006/main" xmlns:p="http://schemas.openxmlformats.org/presentationml/2006/main" xmlns:r="http://schemas.openxmlformats.org/officeDocument/2006/relationships">
+  <p:cSld>
+    <p:spTree>
+      <p:nvGrpSpPr>
+        <p:cNvPr id="1" name=""/>
+        <p:cNvGrpSpPr/>
+        <p:nvPr/>
+      </p:nvGrpSpPr>
+      <p:grpSpPr/>
+      <p:sp>
+        <p:nvSpPr>
+          <p:cNvPr id="2" name="Title 1"/>
+          <p:cNvSpPr>
+            <a:spLocks noGrp="1"/>
+          </p:cNvSpPr>
+          <p:nvPr>
+            <p:ph type="title"/>
+          </p:nvPr>
+        </p:nvSpPr>
+        <p:spPr/>
+        <p:txBody>
+          <a:bodyPr wrap="square"/>
+          <a:lstStyle/>
+          <a:p>
+            <a:pPr>
+              <a:spcAft>
+                <a:spcPts val="0"/>
+              </a:spcAft>
+            </a:pPr>
+            <a:r>
+              <a:rPr sz="2800">
+                <a:latin typeface="Arial"/>
+              </a:rPr>
+              <a:t>O que o leitor de tela realmente anuncia</a:t>
+            </a:r>
+          </a:p>
+        </p:txBody>
+      </p:sp>
+      <p:sp>
+        <p:nvSpPr>
+          <p:cNvPr id="3" name="Content Placeholder 2"/>
+          <p:cNvSpPr>
+            <a:spLocks noGrp="1"/>
+          </p:cNvSpPr>
+          <p:nvPr>
+            <p:ph idx="1"/>
+          </p:nvPr>
+        </p:nvSpPr>
+        <p:spPr/>
+        <p:txBody>
+          <a:bodyPr wrap="square"/>
+          <a:lstStyle/>
+          <a:p>
+            <a:pPr>
+              <a:spcAft>
+                <a:spcPts val="600"/>
+              </a:spcAft>
+            </a:pPr>
+            <a:r>
+              <a:rPr sz="1600">
+                <a:latin typeface="Arial"/>
+              </a:rPr>
+              <a:t>1. lista</a:t>
+            </a:r>
+          </a:p>
+          <a:p>
+            <a:pPr>
+              <a:spcAft>
+                <a:spcPts val="600"/>
+              </a:spcAft>
+            </a:pPr>
+            <a:r>
+              <a:rPr sz="1600">
+                <a:latin typeface="Arial"/>
+              </a:rPr>
+              <a:t>2. lista</a:t>
+            </a:r>
+          </a:p>
+          <a:p>
+            <a:pPr>
+              <a:spcAft>
+                <a:spcPts val="600"/>
+              </a:spcAft>
+            </a:pPr>
+            <a:r>
+              <a:rPr sz="1600">
+                <a:latin typeface="Arial"/>
+              </a:rPr>
+              <a:t>3. cabeçalho da página</a:t>
+            </a:r>
+          </a:p>
+          <a:p>
+            <a:pPr>
+              <a:spcAft>
+                <a:spcPts val="600"/>
+              </a:spcAft>
+            </a:pPr>
+            <a:r>
+              <a:rPr sz="1600">
+                <a:latin typeface="Arial"/>
+              </a:rPr>
+              <a:t>4. região principal</a:t>
+            </a:r>
+          </a:p>
+          <a:p>
+            <a:pPr>
+              <a:spcAft>
+                <a:spcPts val="600"/>
+              </a:spcAft>
+            </a:pPr>
+            <a:r>
+              <a:rPr sz="1600">
+                <a:latin typeface="Arial"/>
+              </a:rPr>
+              <a:t>5. rodapé da página</a:t>
+            </a:r>
+          </a:p>
+          <a:p>
+            <a:pPr>
+              <a:spcAft>
+                <a:spcPts val="600"/>
+              </a:spcAft>
+            </a:pPr>
+            <a:r>
+              <a:rPr sz="1600">
+                <a:latin typeface="Arial"/>
+              </a:rPr>
+              <a:t>6. item de lista</a:t>
+            </a:r>
+          </a:p>
+          <a:p>
+            <a:pPr>
+              <a:spcAft>
+                <a:spcPts val="600"/>
+              </a:spcAft>
+            </a:pPr>
+            <a:r>
+              <a:rPr sz="1600">
+                <a:latin typeface="Arial"/>
+              </a:rPr>
+              <a:t>7. item de lista</a:t>
+            </a:r>
+          </a:p>
+          <a:p>
+            <a:pPr>
+              <a:spcAft>
+                <a:spcPts val="600"/>
+              </a:spcAft>
+            </a:pPr>
+            <a:r>
+              <a:rPr sz="1600">
+                <a:latin typeface="Arial"/>
+              </a:rPr>
+              <a:t>8. item de lista</a:t>
+            </a:r>
+          </a:p>
+          <a:p>
+            <a:pPr>
+              <a:spcAft>
+                <a:spcPts val="600"/>
+              </a:spcAft>
+            </a:pPr>
+            <a:r>
+              <a:rPr sz="1600">
+                <a:latin typeface="Arial"/>
+              </a:rPr>
+              <a:t>9. item de lista</a:t>
+            </a:r>
+          </a:p>
+        </p:txBody>
+      </p:sp>
+    </p:spTree>
+  </p:cSld>
+  <p:clrMapOvr>
+    <a:masterClrMapping/>
+  </p:clrMapOvr>
+</p:sld>
+</file>
+
+<file path=ppt/slides/slide16.xml><?xml version="1.0" encoding="utf-8"?>
+<p:sld xmlns:a="http://schemas.openxmlformats.org/drawingml/2006/main" xmlns:p="http://schemas.openxmlformats.org/presentationml/2006/main" xmlns:r="http://schemas.openxmlformats.org/officeDocument/2006/relationships">
+  <p:cSld>
+    <p:spTree>
+      <p:nvGrpSpPr>
+        <p:cNvPr id="1" name=""/>
+        <p:cNvGrpSpPr/>
+        <p:nvPr/>
+      </p:nvGrpSpPr>
+      <p:grpSpPr/>
+      <p:sp>
+        <p:nvSpPr>
+          <p:cNvPr id="2" name="Title 1"/>
+          <p:cNvSpPr>
+            <a:spLocks noGrp="1"/>
+          </p:cNvSpPr>
+          <p:nvPr>
+            <p:ph type="title"/>
+          </p:nvPr>
+        </p:nvSpPr>
+        <p:spPr/>
+        <p:txBody>
+          <a:bodyPr wrap="square"/>
+          <a:lstStyle/>
+          <a:p>
+            <a:pPr>
+              <a:spcAft>
+                <a:spcPts val="0"/>
+              </a:spcAft>
+            </a:pPr>
+            <a:r>
+              <a:rPr sz="2800">
+                <a:latin typeface="Arial"/>
+              </a:rPr>
+              <a:t>Tarefa complementar: uso real com leitor de tela</a:t>
+            </a:r>
+          </a:p>
+        </p:txBody>
+      </p:sp>
+      <p:sp>
+        <p:nvSpPr>
+          <p:cNvPr id="3" name="Content Placeholder 2"/>
+          <p:cNvSpPr>
+            <a:spLocks noGrp="1"/>
+          </p:cNvSpPr>
+          <p:nvPr>
+            <p:ph idx="1"/>
+          </p:nvPr>
+        </p:nvSpPr>
+        <p:spPr/>
+        <p:txBody>
+          <a:bodyPr wrap="square"/>
+          <a:lstStyle/>
+          <a:p>
+            <a:pPr>
+              <a:spcAft>
+                <a:spcPts val="600"/>
+              </a:spcAft>
+            </a:pPr>
+            <a:r>
+              <a:rPr sz="1700">
+                <a:latin typeface="Arial"/>
+              </a:rPr>
+              <a:t>Aparelho: [PREENCHER: modelo] — [PREENCHER: TalkBack / VoiceOver]</a:t>
+            </a:r>
+          </a:p>
+          <a:p>
+            <a:pPr>
+              <a:spcAft>
+                <a:spcPts val="600"/>
+              </a:spcAft>
+            </a:pPr>
+            <a:r>
+              <a:rPr sz="1700">
+                <a:latin typeface="Arial"/>
+              </a:rPr>
+              <a:t>Tarefa: [PREENCHER: descreva a tarefa]</a:t>
+            </a:r>
+          </a:p>
+          <a:p>
+            <a:pPr>
+              <a:spcAft>
+                <a:spcPts val="600"/>
+              </a:spcAft>
+            </a:pPr>
+            <a:r>
+              <a:rPr sz="1700">
+                <a:latin typeface="Arial"/>
+              </a:rPr>
+              <a:t>Concluída: [PREENCHER: Sim/Não] — tempo: [PREENCHER: ?]</a:t>
+            </a:r>
+          </a:p>
+          <a:p>
+            <a:pPr>
+              <a:spcAft>
+                <a:spcPts val="600"/>
+              </a:spcAft>
+            </a:pPr>
+            <a:r>
+              <a:rPr sz="1700">
+                <a:latin typeface="Arial"/>
+              </a:rPr>
+              <a:t>Relato:</a:t>
+            </a:r>
+          </a:p>
+          <a:p>
+            <a:pPr lvl="1">
+              <a:spcAft>
+                <a:spcPts val="600"/>
+              </a:spcAft>
+            </a:pPr>
+            <a:r>
+              <a:rPr sz="1400">
+                <a:latin typeface="Arial"/>
+              </a:rPr>
+              <a:t>[PREENCHER: resuma a experiência em 3 a 4 linhas]</a:t>
+            </a:r>
+          </a:p>
+        </p:txBody>
+      </p:sp>
+    </p:spTree>
+  </p:cSld>
+  <p:clrMapOvr>
+    <a:masterClrMapping/>
+  </p:clrMapOvr>
+</p:sld>
+</file>
+
+<file path=ppt/slides/slide17.xml><?xml version="1.0" encoding="utf-8"?>
+<p:sld xmlns:a="http://schemas.openxmlformats.org/drawingml/2006/main" xmlns:p="http://schemas.openxmlformats.org/presentationml/2006/main" xmlns:r="http://schemas.openxmlformats.org/officeDocument/2006/relationships">
+  <p:cSld>
+    <p:spTree>
+      <p:nvGrpSpPr>
+        <p:cNvPr id="1" name=""/>
+        <p:cNvGrpSpPr/>
+        <p:nvPr/>
+      </p:nvGrpSpPr>
+      <p:grpSpPr/>
+      <p:sp>
+        <p:nvSpPr>
+          <p:cNvPr id="2" name="Title 1"/>
+          <p:cNvSpPr>
+            <a:spLocks noGrp="1"/>
+          </p:cNvSpPr>
+          <p:nvPr>
+            <p:ph type="title"/>
+          </p:nvPr>
+        </p:nvSpPr>
+        <p:spPr/>
+        <p:txBody>
+          <a:bodyPr wrap="square"/>
+          <a:lstStyle/>
+          <a:p>
+            <a:pPr>
+              <a:spcAft>
+                <a:spcPts val="0"/>
+              </a:spcAft>
+            </a:pPr>
+            <a:r>
+              <a:rPr sz="2800">
+                <a:latin typeface="Arial"/>
+              </a:rPr>
+              <a:t>Nível de conformidade WCAG 2.1</a:t>
+            </a:r>
+          </a:p>
+        </p:txBody>
+      </p:sp>
+      <p:sp>
+        <p:nvSpPr>
+          <p:cNvPr id="3" name="Content Placeholder 2"/>
+          <p:cNvSpPr>
+            <a:spLocks noGrp="1"/>
+          </p:cNvSpPr>
+          <p:nvPr>
+            <p:ph idx="1"/>
+          </p:nvPr>
+        </p:nvSpPr>
+        <p:spPr/>
+        <p:txBody>
+          <a:bodyPr wrap="square"/>
+          <a:lstStyle/>
+          <a:p>
+            <a:pPr>
+              <a:spcAft>
+                <a:spcPts val="600"/>
+              </a:spcAft>
+            </a:pPr>
+            <a:r>
+              <a:rPr sz="1700">
+                <a:latin typeface="Arial"/>
+              </a:rPr>
+              <a:t>Regra do W3C: a conformidade é integral — uma única falha de Nível A</a:t>
+            </a:r>
+          </a:p>
+          <a:p>
+            <a:pPr lvl="1">
+              <a:spcAft>
+                <a:spcPts val="600"/>
+              </a:spcAft>
+            </a:pPr>
+            <a:r>
+              <a:rPr sz="1400">
+                <a:latin typeface="Arial"/>
+              </a:rPr>
+              <a:t>impede a conformidade em qualquer nível</a:t>
+            </a:r>
+          </a:p>
+          <a:p>
+            <a:pPr>
+              <a:spcAft>
+                <a:spcPts val="600"/>
+              </a:spcAft>
+            </a:pPr>
+            <a:r>
+              <a:rPr sz="1700">
+                <a:latin typeface="Arial"/>
+              </a:rPr>
+              <a:t>Falhas em critérios de Nível A: 1.4.1 Uso de cores (marcador do slide ativo diferenciado apenas pela cor de fundo) e 2.2.2 Pausar, Parar, Ocultar (banner rotativo com avanço automático a cada 4 segundos, sem mecanismo de pausa).</a:t>
+            </a:r>
+          </a:p>
+          <a:p>
+            <a:pPr>
+              <a:spcAft>
+                <a:spcPts val="600"/>
+              </a:spcAft>
+            </a:pPr>
+            <a:r>
+              <a:rPr sz="1700">
+                <a:latin typeface="Arial"/>
+              </a:rPr>
+              <a:t>Falhas em critérios de Nível AA: 1.4.3 Contraste mínimo (4 reprovações confirmadas por amostragem de pixels, a pior em 1,66:1); 1.4.10 Reflow (conteúdo de 330 px em tela de 320 px, gerando rolagem horizontal); 1.4.11 Contraste não textual (indicador de foco em 1,56:1 sobre o fundo branco do conteúdo); 1.4.12 Espaçamento de texto (rolagem horizontal e 3 elementos cortados); 2.5.8 Tamanho do alvo (23 dos 51 alvos interativos da versão móvel medem menos de 24x24 px).</a:t>
+            </a:r>
+          </a:p>
+          <a:p>
+            <a:pPr>
+              <a:spcAft>
+                <a:spcPts val="600"/>
+              </a:spcAft>
+            </a:pPr>
+            <a:r>
+              <a:rPr sz="1700">
+                <a:latin typeface="Arial"/>
+              </a:rPr>
+              <a:t>Resultado: Não atinge o Nível A</a:t>
+            </a:r>
+          </a:p>
+          <a:p>
+            <a:pPr>
+              <a:spcAft>
+                <a:spcPts val="600"/>
+              </a:spcAft>
+            </a:pPr>
+            <a:r>
+              <a:rPr sz="1700">
+                <a:latin typeface="Arial"/>
+              </a:rPr>
+              <a:t>Nível AA é o patamar exigido da administração pública brasileira</a:t>
+            </a:r>
+          </a:p>
+        </p:txBody>
+      </p:sp>
+    </p:spTree>
+  </p:cSld>
+  <p:clrMapOvr>
+    <a:masterClrMapping/>
+  </p:clrMapOvr>
+</p:sld>
+</file>
+
+<file path=ppt/slides/slide18.xml><?xml version="1.0" encoding="utf-8"?>
+<p:sld xmlns:a="http://schemas.openxmlformats.org/drawingml/2006/main" xmlns:p="http://schemas.openxmlformats.org/presentationml/2006/main" xmlns:r="http://schemas.openxmlformats.org/officeDocument/2006/relationships">
+  <p:cSld>
+    <p:spTree>
+      <p:nvGrpSpPr>
+        <p:cNvPr id="1" name=""/>
+        <p:cNvGrpSpPr/>
+        <p:nvPr/>
+      </p:nvGrpSpPr>
+      <p:grpSpPr/>
+      <p:sp>
+        <p:nvSpPr>
+          <p:cNvPr id="2" name="Title 1"/>
+          <p:cNvSpPr>
+            <a:spLocks noGrp="1"/>
+          </p:cNvSpPr>
+          <p:nvPr>
+            <p:ph type="title"/>
+          </p:nvPr>
+        </p:nvSpPr>
+        <p:spPr/>
+        <p:txBody>
+          <a:bodyPr wrap="square"/>
+          <a:lstStyle/>
+          <a:p>
+            <a:pPr>
+              <a:spcAft>
+                <a:spcPts val="0"/>
+              </a:spcAft>
+            </a:pPr>
+            <a:r>
+              <a:rPr sz="2800">
+                <a:latin typeface="Arial"/>
+              </a:rPr>
+              <a:t>Recomendações priorizadas</a:t>
+            </a:r>
+          </a:p>
+        </p:txBody>
+      </p:sp>
+      <p:sp>
+        <p:nvSpPr>
+          <p:cNvPr id="3" name="Content Placeholder 2"/>
+          <p:cNvSpPr>
+            <a:spLocks noGrp="1"/>
+          </p:cNvSpPr>
+          <p:nvPr>
+            <p:ph idx="1"/>
+          </p:nvPr>
+        </p:nvSpPr>
+        <p:spPr/>
+        <p:txBody>
+          <a:bodyPr wrap="square"/>
+          <a:lstStyle/>
+          <a:p>
+            <a:pPr>
+              <a:spcAft>
+                <a:spcPts val="600"/>
+              </a:spcAft>
+            </a:pPr>
+            <a:r>
+              <a:rPr sz="1500">
+                <a:latin typeface="Arial"/>
+              </a:rPr>
+              <a:t>[Crítica] Banner rotativo sem controle de pausa → WCAG 2.2.2 (A)</a:t>
+            </a:r>
+          </a:p>
+          <a:p>
+            <a:pPr>
+              <a:spcAft>
+                <a:spcPts val="600"/>
+              </a:spcAft>
+            </a:pPr>
+            <a:r>
+              <a:rPr sz="1500">
+                <a:latin typeface="Arial"/>
+              </a:rPr>
+              <a:t>[Crítica] Slide ativo identificado apenas pela cor → WCAG 1.4.1 (A)</a:t>
+            </a:r>
+          </a:p>
+          <a:p>
+            <a:pPr>
+              <a:spcAft>
+                <a:spcPts val="600"/>
+              </a:spcAft>
+            </a:pPr>
+            <a:r>
+              <a:rPr sz="1500">
+                <a:latin typeface="Arial"/>
+              </a:rPr>
+              <a:t>[Alta] Contraste insuficiente nos controles do banner → WCAG 1.4.3 (AA)</a:t>
+            </a:r>
+          </a:p>
+          <a:p>
+            <a:pPr>
+              <a:spcAft>
+                <a:spcPts val="600"/>
+              </a:spcAft>
+            </a:pPr>
+            <a:r>
+              <a:rPr sz="1500">
+                <a:latin typeface="Arial"/>
+              </a:rPr>
+              <a:t>[Alta] Página inicial e página de contato sem &lt;h1&gt; → WCAG 1.3.1 / 2.4.6 (A/AA)</a:t>
+            </a:r>
+          </a:p>
+          <a:p>
+            <a:pPr>
+              <a:spcAft>
+                <a:spcPts val="600"/>
+              </a:spcAft>
+            </a:pPr>
+            <a:r>
+              <a:rPr sz="1500">
+                <a:latin typeface="Arial"/>
+              </a:rPr>
+              <a:t>[Alta] Ausência de região de navegação → WCAG 1.3.1 (A)</a:t>
+            </a:r>
+          </a:p>
+          <a:p>
+            <a:pPr>
+              <a:spcAft>
+                <a:spcPts val="600"/>
+              </a:spcAft>
+            </a:pPr>
+            <a:r>
+              <a:rPr sz="1500">
+                <a:latin typeface="Arial"/>
+              </a:rPr>
+              <a:t>[Alta] Rolagem horizontal em telas estreitas → WCAG 1.4.10 (AA)</a:t>
+            </a:r>
+          </a:p>
+          <a:p>
+            <a:pPr>
+              <a:spcAft>
+                <a:spcPts val="600"/>
+              </a:spcAft>
+            </a:pPr>
+            <a:r>
+              <a:rPr sz="1500">
+                <a:latin typeface="Arial"/>
+              </a:rPr>
+              <a:t>[Média] Indicador de foco pouco perceptível sobre fundo branco → WCAG 1.4.11 (AA)</a:t>
+            </a:r>
+          </a:p>
+          <a:p>
+            <a:pPr>
+              <a:spcAft>
+                <a:spcPts val="600"/>
+              </a:spcAft>
+            </a:pPr>
+            <a:r>
+              <a:rPr sz="1500">
+                <a:latin typeface="Arial"/>
+              </a:rPr>
+              <a:t>[Média] Alvos de toque abaixo do mínimo → WCAG 2.5.8 (AA)</a:t>
+            </a:r>
+          </a:p>
+        </p:txBody>
+      </p:sp>
+    </p:spTree>
+  </p:cSld>
+  <p:clrMapOvr>
+    <a:masterClrMapping/>
+  </p:clrMapOvr>
+</p:sld>
+</file>
+
+<file path=ppt/slides/slide19.xml><?xml version="1.0" encoding="utf-8"?>
+<p:sld xmlns:a="http://schemas.openxmlformats.org/drawingml/2006/main" xmlns:p="http://schemas.openxmlformats.org/presentationml/2006/main" xmlns:r="http://schemas.openxmlformats.org/officeDocument/2006/relationships">
+  <p:cSld>
+    <p:spTree>
+      <p:nvGrpSpPr>
+        <p:cNvPr id="1" name=""/>
+        <p:cNvGrpSpPr/>
+        <p:nvPr/>
+      </p:nvGrpSpPr>
+      <p:grpSpPr/>
+      <p:sp>
+        <p:nvSpPr>
+          <p:cNvPr id="2" name="Title 1"/>
+          <p:cNvSpPr>
+            <a:spLocks noGrp="1"/>
+          </p:cNvSpPr>
+          <p:nvPr>
+            <p:ph type="title"/>
+          </p:nvPr>
+        </p:nvSpPr>
+        <p:spPr/>
+        <p:txBody>
+          <a:bodyPr wrap="square"/>
+          <a:lstStyle/>
+          <a:p>
+            <a:pPr>
+              <a:spcAft>
+                <a:spcPts val="0"/>
+              </a:spcAft>
+            </a:pPr>
+            <a:r>
+              <a:rPr sz="2800">
+                <a:latin typeface="Arial"/>
+              </a:rPr>
+              <a:t>Conclusão</a:t>
+            </a:r>
+          </a:p>
+        </p:txBody>
+      </p:sp>
+      <p:sp>
+        <p:nvSpPr>
+          <p:cNvPr id="3" name="Content Placeholder 2"/>
+          <p:cNvSpPr>
+            <a:spLocks noGrp="1"/>
+          </p:cNvSpPr>
+          <p:nvPr>
+            <p:ph idx="1"/>
+          </p:nvPr>
+        </p:nvSpPr>
+        <p:spPr/>
+        <p:txBody>
+          <a:bodyPr wrap="square"/>
+          <a:lstStyle/>
+          <a:p>
+            <a:pPr>
+              <a:spcAft>
+                <a:spcPts val="600"/>
+              </a:spcAft>
+            </a:pPr>
+            <a:r>
+              <a:rPr sz="1700">
+                <a:latin typeface="Arial"/>
+              </a:rPr>
+              <a:t>Boa aparência visual não significa boa acessibilidade:</a:t>
+            </a:r>
+          </a:p>
+          <a:p>
+            <a:pPr lvl="1">
+              <a:spcAft>
+                <a:spcPts val="600"/>
+              </a:spcAft>
+            </a:pPr>
+            <a:r>
+              <a:rPr sz="1400">
+                <a:latin typeface="Arial"/>
+              </a:rPr>
+              <a:t>as barreiras estão na camada de marcação, invisíveis ao usuário vidente</a:t>
+            </a:r>
+          </a:p>
+          <a:p>
+            <a:pPr>
+              <a:spcAft>
+                <a:spcPts val="600"/>
+              </a:spcAft>
+            </a:pPr>
+            <a:r>
+              <a:rPr sz="1700">
+                <a:latin typeface="Arial"/>
+              </a:rPr>
+              <a:t>Ferramentas automáticas quantificam; só o teste humano revela a experiência</a:t>
+            </a:r>
+          </a:p>
+          <a:p>
+            <a:pPr>
+              <a:spcAft>
+                <a:spcPts val="600"/>
+              </a:spcAft>
+            </a:pPr>
+            <a:r>
+              <a:rPr sz="1700">
+                <a:latin typeface="Arial"/>
+              </a:rPr>
+              <a:t>A maior parte das correções é de baixo custo — atributos alt, labels,</a:t>
+            </a:r>
+          </a:p>
+          <a:p>
+            <a:pPr lvl="1">
+              <a:spcAft>
+                <a:spcPts val="600"/>
+              </a:spcAft>
+            </a:pPr>
+            <a:r>
+              <a:rPr sz="1400">
+                <a:latin typeface="Arial"/>
+              </a:rPr>
+              <a:t>hierarquia de cabeçalhos e elementos semânticos de região</a:t>
+            </a:r>
+          </a:p>
+          <a:p>
+            <a:pPr>
+              <a:spcAft>
+                <a:spcPts val="600"/>
+              </a:spcAft>
+            </a:pPr>
+            <a:r>
+              <a:rPr sz="1700">
+                <a:latin typeface="Arial"/>
+              </a:rPr>
+              <a:t>Acessibilidade se projeta desde o início; corrigir depois custa mais</a:t>
+            </a:r>
+          </a:p>
+          <a:p>
+            <a:pPr>
+              <a:spcAft>
+                <a:spcPts val="600"/>
+              </a:spcAft>
+            </a:pPr>
+            <a:r>
+              <a:rPr sz="1700">
+                <a:latin typeface="Arial"/>
+              </a:rPr>
+              <a:t>Recomenda-se reavaliação periódica: cada publicação pode reintroduzir barreiras</a:t>
             </a:r>
           </a:p>
         </p:txBody>
@@ -13552,6 +14307,66 @@
 </p:sld>
 </file>
 
+<file path=ppt/slides/slide20.xml><?xml version="1.0" encoding="utf-8"?>
+<p:sld xmlns:a="http://schemas.openxmlformats.org/drawingml/2006/main" xmlns:p="http://schemas.openxmlformats.org/presentationml/2006/main" xmlns:r="http://schemas.openxmlformats.org/officeDocument/2006/relationships">
+  <p:cSld>
+    <p:spTree>
+      <p:nvGrpSpPr>
+        <p:cNvPr id="1" name=""/>
+        <p:cNvGrpSpPr/>
+        <p:nvPr/>
+      </p:nvGrpSpPr>
+      <p:grpSpPr/>
+      <p:sp>
+        <p:nvSpPr>
+          <p:cNvPr id="3" name="Content Placeholder 2"/>
+          <p:cNvSpPr>
+            <a:spLocks noGrp="1"/>
+          </p:cNvSpPr>
+          <p:nvPr>
+            <p:ph idx="1"/>
+          </p:nvPr>
+        </p:nvSpPr>
+        <p:spPr/>
+        <p:txBody>
+          <a:bodyPr wrap="square"/>
+          <a:lstStyle/>
+          <a:p>
+            <a:pPr>
+              <a:spcAft>
+                <a:spcPts val="600"/>
+              </a:spcAft>
+            </a:pPr>
+            <a:r>
+              <a:rPr sz="5400">
+                <a:latin typeface="Arial"/>
+              </a:rPr>
+              <a:t>Obrigado!</a:t>
+            </a:r>
+          </a:p>
+          <a:p>
+            <a:pPr>
+              <a:spcAft>
+                <a:spcPts val="600"/>
+              </a:spcAft>
+            </a:pPr>
+            <a:r>
+              <a:rPr sz="5400">
+                <a:latin typeface="Arial"/>
+              </a:rPr>
+              <a:t>Perguntas?</a:t>
+            </a:r>
+          </a:p>
+        </p:txBody>
+      </p:sp>
+    </p:spTree>
+  </p:cSld>
+  <p:clrMapOvr>
+    <a:masterClrMapping/>
+  </p:clrMapOvr>
+</p:sld>
+</file>
+
 <file path=ppt/slides/slide3.xml><?xml version="1.0" encoding="utf-8"?>
 <p:sld xmlns:a="http://schemas.openxmlformats.org/drawingml/2006/main" xmlns:p="http://schemas.openxmlformats.org/presentationml/2006/main" xmlns:r="http://schemas.openxmlformats.org/officeDocument/2006/relationships">
   <p:cSld>
@@ -14025,16 +14840,7 @@
               <a:rPr sz="1500">
                 <a:latin typeface="Arial"/>
               </a:rPr>
-              <a:t>1. Texto alternativo em imagens — 1.1.1 (A): </a:t>
-            </a:r>
-            <a:r>
-              <a:rPr sz="1500" b="1">
-                <a:solidFill>
-                  <a:srgbClr val="C01C1C"/>
-                </a:solidFill>
-                <a:latin typeface="Arial"/>
-              </a:rPr>
-              <a:t>[PREENCHER: Conforme / Não conforme / Parcial]</a:t>
+              <a:t>1. Texto alternativo em imagens — 1.1.1 (A): Parcial</a:t>
             </a:r>
           </a:p>
           <a:p>
@@ -14047,16 +14853,7 @@
               <a:rPr sz="1500">
                 <a:latin typeface="Arial"/>
               </a:rPr>
-              <a:t>2. Hierarquia de cabeçalhos — 1.3.1 (A): </a:t>
-            </a:r>
-            <a:r>
-              <a:rPr sz="1500" b="1">
-                <a:solidFill>
-                  <a:srgbClr val="C01C1C"/>
-                </a:solidFill>
-                <a:latin typeface="Arial"/>
-              </a:rPr>
-              <a:t>[PREENCHER: Conforme / Não conforme / Parcial]</a:t>
+              <a:t>2. Hierarquia de cabeçalhos — 1.3.1 (A): Não conforme</a:t>
             </a:r>
           </a:p>
           <a:p>
@@ -14069,16 +14866,7 @@
               <a:rPr sz="1500">
                 <a:latin typeface="Arial"/>
               </a:rPr>
-              <a:t>3. Idioma da página declarado — 3.1.1 (A): </a:t>
-            </a:r>
-            <a:r>
-              <a:rPr sz="1500" b="1">
-                <a:solidFill>
-                  <a:srgbClr val="C01C1C"/>
-                </a:solidFill>
-                <a:latin typeface="Arial"/>
-              </a:rPr>
-              <a:t>[PREENCHER: Conforme / Não conforme / Parcial]</a:t>
+              <a:t>3. Idioma da página declarado — 3.1.1 (A): Conforme</a:t>
             </a:r>
           </a:p>
           <a:p>
@@ -14091,16 +14879,7 @@
               <a:rPr sz="1500">
                 <a:latin typeface="Arial"/>
               </a:rPr>
-              <a:t>4. Título de página descritivo — 2.4.2 (A): </a:t>
-            </a:r>
-            <a:r>
-              <a:rPr sz="1500" b="1">
-                <a:solidFill>
-                  <a:srgbClr val="C01C1C"/>
-                </a:solidFill>
-                <a:latin typeface="Arial"/>
-              </a:rPr>
-              <a:t>[PREENCHER: Conforme / Não conforme / Parcial]</a:t>
+              <a:t>4. Título de página descritivo — 2.4.2 (A): Conforme</a:t>
             </a:r>
           </a:p>
           <a:p>
@@ -14113,16 +14892,7 @@
               <a:rPr sz="1500">
                 <a:latin typeface="Arial"/>
               </a:rPr>
-              <a:t>5. Contraste mínimo de cores — 1.4.3 (AA): </a:t>
-            </a:r>
-            <a:r>
-              <a:rPr sz="1500" b="1">
-                <a:solidFill>
-                  <a:srgbClr val="C01C1C"/>
-                </a:solidFill>
-                <a:latin typeface="Arial"/>
-              </a:rPr>
-              <a:t>[PREENCHER: Conforme / Não conforme / Parcial]</a:t>
+              <a:t>5. Contraste mínimo de cores — 1.4.3 (AA): Não conforme</a:t>
             </a:r>
           </a:p>
           <a:p>
@@ -14135,16 +14905,7 @@
               <a:rPr sz="1500">
                 <a:latin typeface="Arial"/>
               </a:rPr>
-              <a:t>6. Cor não é o único meio de transmitir informação — 1.4.1 (A): </a:t>
-            </a:r>
-            <a:r>
-              <a:rPr sz="1500" b="1">
-                <a:solidFill>
-                  <a:srgbClr val="C01C1C"/>
-                </a:solidFill>
-                <a:latin typeface="Arial"/>
-              </a:rPr>
-              <a:t>[PREENCHER: Conforme / Não conforme / Parcial]</a:t>
+              <a:t>6. Cor não é o único meio de transmitir informação — 1.4.1 (A): Não conforme</a:t>
             </a:r>
           </a:p>
           <a:p>
@@ -14157,16 +14918,7 @@
               <a:rPr sz="1500">
                 <a:latin typeface="Arial"/>
               </a:rPr>
-              <a:t>7. Redimensionamento de texto até 200% — 1.4.4 (AA): </a:t>
-            </a:r>
-            <a:r>
-              <a:rPr sz="1500" b="1">
-                <a:solidFill>
-                  <a:srgbClr val="C01C1C"/>
-                </a:solidFill>
-                <a:latin typeface="Arial"/>
-              </a:rPr>
-              <a:t>[PREENCHER: Conforme / Não conforme / Parcial]</a:t>
+              <a:t>7. Redimensionamento de texto até 200% — 1.4.4 (AA): Parcial</a:t>
             </a:r>
           </a:p>
           <a:p>
@@ -14179,16 +14931,7 @@
               <a:rPr sz="1500">
                 <a:latin typeface="Arial"/>
               </a:rPr>
-              <a:t>8. Navegação completa por teclado — 2.1.1 (A): </a:t>
-            </a:r>
-            <a:r>
-              <a:rPr sz="1500" b="1">
-                <a:solidFill>
-                  <a:srgbClr val="C01C1C"/>
-                </a:solidFill>
-                <a:latin typeface="Arial"/>
-              </a:rPr>
-              <a:t>[PREENCHER: Conforme / Não conforme / Parcial]</a:t>
+              <a:t>8. Navegação completa por teclado — 2.1.1 (A): Conforme</a:t>
             </a:r>
           </a:p>
         </p:txBody>
@@ -14264,16 +15007,7 @@
               <a:rPr sz="1500">
                 <a:latin typeface="Arial"/>
               </a:rPr>
-              <a:t>9. Indicador de foco visível — 2.4.7 (AA): </a:t>
-            </a:r>
-            <a:r>
-              <a:rPr sz="1500" b="1">
-                <a:solidFill>
-                  <a:srgbClr val="C01C1C"/>
-                </a:solidFill>
-                <a:latin typeface="Arial"/>
-              </a:rPr>
-              <a:t>[PREENCHER: Conforme / Não conforme / Parcial]</a:t>
+              <a:t>9. Indicador de foco visível — 2.4.7 (AA): Parcial</a:t>
             </a:r>
           </a:p>
           <a:p>
@@ -14286,16 +15020,7 @@
               <a:rPr sz="1500">
                 <a:latin typeface="Arial"/>
               </a:rPr>
-              <a:t>10. Link para pular ao conteúdo principal — 2.4.1 (A): </a:t>
-            </a:r>
-            <a:r>
-              <a:rPr sz="1500" b="1">
-                <a:solidFill>
-                  <a:srgbClr val="C01C1C"/>
-                </a:solidFill>
-                <a:latin typeface="Arial"/>
-              </a:rPr>
-              <a:t>[PREENCHER: Conforme / Não conforme / Parcial]</a:t>
+              <a:t>10. Link para pular ao conteúdo principal — 2.4.1 (A): Conforme</a:t>
             </a:r>
           </a:p>
           <a:p>
@@ -14308,16 +15033,7 @@
               <a:rPr sz="1500">
                 <a:latin typeface="Arial"/>
               </a:rPr>
-              <a:t>11. Rótulos associados aos campos de formulário — 3.3.2 (A): </a:t>
-            </a:r>
-            <a:r>
-              <a:rPr sz="1500" b="1">
-                <a:solidFill>
-                  <a:srgbClr val="C01C1C"/>
-                </a:solidFill>
-                <a:latin typeface="Arial"/>
-              </a:rPr>
-              <a:t>[PREENCHER: Conforme / Não conforme / Parcial]</a:t>
+              <a:t>11. Rótulos associados aos campos de formulário — 3.3.2 (A): Conforme</a:t>
             </a:r>
           </a:p>
           <a:p>
@@ -14330,16 +15046,7 @@
               <a:rPr sz="1500">
                 <a:latin typeface="Arial"/>
               </a:rPr>
-              <a:t>12. Identificação e sugestão de correção de erros — 3.3.1 (A / AA): </a:t>
-            </a:r>
-            <a:r>
-              <a:rPr sz="1500" b="1">
-                <a:solidFill>
-                  <a:srgbClr val="C01C1C"/>
-                </a:solidFill>
-                <a:latin typeface="Arial"/>
-              </a:rPr>
-              <a:t>[PREENCHER: Conforme / Não conforme / Parcial]</a:t>
+              <a:t>12. Identificação e sugestão de correção de erros — 3.3.1 (A / AA): Não aplicável</a:t>
             </a:r>
           </a:p>
           <a:p>
@@ -14352,16 +15059,7 @@
               <a:rPr sz="1500">
                 <a:latin typeface="Arial"/>
               </a:rPr>
-              <a:t>13. Links com texto descritivo — 2.4.4 (A): </a:t>
-            </a:r>
-            <a:r>
-              <a:rPr sz="1500" b="1">
-                <a:solidFill>
-                  <a:srgbClr val="C01C1C"/>
-                </a:solidFill>
-                <a:latin typeface="Arial"/>
-              </a:rPr>
-              <a:t>[PREENCHER: Conforme / Não conforme / Parcial]</a:t>
+              <a:t>13. Links com texto descritivo — 2.4.4 (A): Parcial</a:t>
             </a:r>
           </a:p>
           <a:p>
@@ -14374,16 +15072,7 @@
               <a:rPr sz="1500">
                 <a:latin typeface="Arial"/>
               </a:rPr>
-              <a:t>14. Controle de conteúdo em movimento — 2.2.2 (A): </a:t>
-            </a:r>
-            <a:r>
-              <a:rPr sz="1500" b="1">
-                <a:solidFill>
-                  <a:srgbClr val="C01C1C"/>
-                </a:solidFill>
-                <a:latin typeface="Arial"/>
-              </a:rPr>
-              <a:t>[PREENCHER: Conforme / Não conforme / Parcial]</a:t>
+              <a:t>14. Controle de conteúdo em movimento — 2.2.2 (A): Não conforme</a:t>
             </a:r>
           </a:p>
           <a:p>
@@ -14396,16 +15085,7 @@
               <a:rPr sz="1500">
                 <a:latin typeface="Arial"/>
               </a:rPr>
-              <a:t>15. Estrutura semântica e marcação válida — 1.3.1 (A): </a:t>
-            </a:r>
-            <a:r>
-              <a:rPr sz="1500" b="1">
-                <a:solidFill>
-                  <a:srgbClr val="C01C1C"/>
-                </a:solidFill>
-                <a:latin typeface="Arial"/>
-              </a:rPr>
-              <a:t>[PREENCHER: Conforme / Não conforme / Parcial]</a:t>
+              <a:t>15. Estrutura semântica e marcação válida — 1.3.1 (A): Parcial</a:t>
             </a:r>
           </a:p>
         </p:txBody>
@@ -14562,6 +15242,19 @@
               <a:t>Limitação: detectam ausência de alt, mas não julgam se o alt descreve bem a imagem</a:t>
             </a:r>
           </a:p>
+          <a:p>
+            <a:pPr>
+              <a:spcAft>
+                <a:spcPts val="600"/>
+              </a:spcAft>
+            </a:pPr>
+            <a:r>
+              <a:rPr sz="1600">
+                <a:latin typeface="Arial"/>
+              </a:rPr>
+              <a:t>WAVE e ASES exigem execução no navegador — o ASES protege o envio com CAPTCHA</a:t>
+            </a:r>
+          </a:p>
         </p:txBody>
       </p:sp>
     </p:spTree>
@@ -14606,7 +15299,7 @@
               <a:rPr sz="2800">
                 <a:latin typeface="Arial"/>
               </a:rPr>
-              <a:t>Simulação automatizada em smartphone</a:t>
+              <a:t>Avaliador automático: axe-core</a:t>
             </a:r>
           </a:p>
         </p:txBody>
@@ -14632,13 +15325,127 @@
               </a:spcAft>
             </a:pPr>
             <a:r>
-              <a:rPr sz="1800" b="1">
-                <a:solidFill>
-                  <a:srgbClr val="C01C1C"/>
-                </a:solidFill>
+              <a:rPr sz="1500">
                 <a:latin typeface="Arial"/>
               </a:rPr>
-              <a:t>[PREENCHER: execute ferramenta/simulador_mobile.py e gere os documentos novamente]</a:t>
+              <a:t>axe-core 4.10.2 (Deque) — motor usado pelas extensões WAVE e Lighthouse</a:t>
+            </a:r>
+          </a:p>
+          <a:p>
+            <a:pPr>
+              <a:spcAft>
+                <a:spcPts val="600"/>
+              </a:spcAft>
+            </a:pPr>
+            <a:r>
+              <a:rPr sz="1500">
+                <a:latin typeface="Arial"/>
+              </a:rPr>
+              <a:t>Violações diretas de critério WCAG A/AA: 0 nas 3 páginas</a:t>
+            </a:r>
+          </a:p>
+          <a:p>
+            <a:pPr lvl="1">
+              <a:spcAft>
+                <a:spcPts val="600"/>
+              </a:spcAft>
+            </a:pPr>
+            <a:r>
+              <a:rPr sz="1200">
+                <a:latin typeface="Arial"/>
+              </a:rPr>
+              <a:t>Regras aprovadas: 41 · 40 · 35</a:t>
+            </a:r>
+          </a:p>
+          <a:p>
+            <a:pPr>
+              <a:spcAft>
+                <a:spcPts val="600"/>
+              </a:spcAft>
+            </a:pPr>
+            <a:r>
+              <a:rPr sz="1500">
+                <a:latin typeface="Arial"/>
+              </a:rPr>
+              <a:t>Ocorrências de boas práticas:</a:t>
+            </a:r>
+          </a:p>
+          <a:p>
+            <a:pPr lvl="1">
+              <a:spcAft>
+                <a:spcPts val="600"/>
+              </a:spcAft>
+            </a:pPr>
+            <a:r>
+              <a:rPr sz="1200">
+                <a:latin typeface="Arial"/>
+              </a:rPr>
+              <a:t>region — 10x</a:t>
+            </a:r>
+          </a:p>
+          <a:p>
+            <a:pPr lvl="1">
+              <a:spcAft>
+                <a:spcPts val="600"/>
+              </a:spcAft>
+            </a:pPr>
+            <a:r>
+              <a:rPr sz="1200">
+                <a:latin typeface="Arial"/>
+              </a:rPr>
+              <a:t>image-redundant-alt — 4x</a:t>
+            </a:r>
+          </a:p>
+          <a:p>
+            <a:pPr lvl="1">
+              <a:spcAft>
+                <a:spcPts val="600"/>
+              </a:spcAft>
+            </a:pPr>
+            <a:r>
+              <a:rPr sz="1200">
+                <a:latin typeface="Arial"/>
+              </a:rPr>
+              <a:t>page-has-heading-one — 2x</a:t>
+            </a:r>
+          </a:p>
+          <a:p>
+            <a:pPr>
+              <a:spcAft>
+                <a:spcPts val="600"/>
+              </a:spcAft>
+            </a:pPr>
+            <a:r>
+              <a:rPr sz="1500">
+                <a:latin typeface="Arial"/>
+              </a:rPr>
+              <a:t>Devolvido para julgamento humano:</a:t>
+            </a:r>
+          </a:p>
+          <a:p>
+            <a:pPr lvl="1">
+              <a:spcAft>
+                <a:spcPts val="600"/>
+              </a:spcAft>
+            </a:pPr>
+            <a:r>
+              <a:rPr sz="1200">
+                <a:latin typeface="Arial"/>
+              </a:rPr>
+              <a:t>color-contrast — 80x</a:t>
+            </a:r>
+          </a:p>
+          <a:p>
+            <a:pPr lvl="1">
+              <a:spcAft>
+                <a:spcPts val="600"/>
+              </a:spcAft>
+            </a:pPr>
+            <a:r>
+              <a:rPr sz="1200">
+                <a:latin typeface="Arial"/>
+              </a:rPr>
+              <a:t>frame-tested — 1x</a:t>
             </a:r>
           </a:p>
         </p:txBody>

--- a/apresentacao/APRESENTACAO_AVALIACAO_ACESSIBILIDADE.pptx
+++ b/apresentacao/APRESENTACAO_AVALIACAO_ACESSIBILIDADE.pptx
@@ -25,6 +25,7 @@
     <p:sldId id="273" r:id="rId21"/>
     <p:sldId id="274" r:id="rId22"/>
     <p:sldId id="275" r:id="rId23"/>
+    <p:sldId id="276" r:id="rId24"/>
   </p:sldIdLst>
   <p:sldSz cy="6858000" cx="12192000"/>
   <p:notesSz cx="6858000" cy="9144000"/>
@@ -13247,27 +13248,58 @@
               </a:spcAft>
             </a:pPr>
             <a:r>
-              <a:rPr sz="2800">
+              <a:rPr sz="2600">
                 <a:latin typeface="Arial"/>
               </a:rPr>
-              <a:t>Simulação automatizada em smartphone</a:t>
+              <a:t>O que só o aparelho real mostrou: VLibras</a:t>
             </a:r>
           </a:p>
         </p:txBody>
       </p:sp>
+      <p:pic>
+        <p:nvPicPr>
+          <p:cNvPr id="3" name="Picture 2" descr="14-vlibras-botao-flutuante.jpg"/>
+          <p:cNvPicPr>
+            <a:picLocks noChangeAspect="1"/>
+          </p:cNvPicPr>
+          <p:nvPr/>
+        </p:nvPicPr>
+        <p:blipFill>
+          <a:blip r:embed="rId2"/>
+          <a:stretch>
+            <a:fillRect/>
+          </a:stretch>
+        </p:blipFill>
+        <p:spPr>
+          <a:xfrm>
+            <a:off x="853440" y="1371600"/>
+            <a:ext cx="10485120" cy="3640666"/>
+          </a:xfrm>
+          <a:prstGeom prst="rect">
+            <a:avLst/>
+          </a:prstGeom>
+        </p:spPr>
+      </p:pic>
       <p:sp>
         <p:nvSpPr>
-          <p:cNvPr id="3" name="Content Placeholder 2"/>
-          <p:cNvSpPr>
-            <a:spLocks noGrp="1"/>
-          </p:cNvSpPr>
-          <p:nvPr>
-            <p:ph idx="1"/>
-          </p:nvPr>
+          <p:cNvPr id="4" name="TextBox 3"/>
+          <p:cNvSpPr txBox="1"/>
+          <p:nvPr/>
         </p:nvSpPr>
-        <p:spPr/>
+        <p:spPr>
+          <a:xfrm>
+            <a:off x="853440" y="5149426"/>
+            <a:ext cx="10485120" cy="822960"/>
+          </a:xfrm>
+          <a:prstGeom prst="rect">
+            <a:avLst/>
+          </a:prstGeom>
+          <a:noFill/>
+        </p:spPr>
         <p:txBody>
-          <a:bodyPr wrap="square"/>
+          <a:bodyPr wrap="square">
+            <a:spAutoFit/>
+          </a:bodyPr>
           <a:lstStyle/>
           <a:p>
             <a:pPr>
@@ -13276,88 +13308,10 @@
               </a:spcAft>
             </a:pPr>
             <a:r>
-              <a:rPr sz="1600">
+              <a:rPr sz="1400">
                 <a:latin typeface="Arial"/>
               </a:rPr>
-              <a:t>Aparelho emulado: Google Pixel 7 (TalkBack) — 412×915 px</a:t>
-            </a:r>
-          </a:p>
-          <a:p>
-            <a:pPr>
-              <a:spcAft>
-                <a:spcPts val="600"/>
-              </a:spcAft>
-            </a:pPr>
-            <a:r>
-              <a:rPr sz="1600">
-                <a:latin typeface="Arial"/>
-              </a:rPr>
-              <a:t>Elementos anunciados SEM RÓTULO: 0  (WCAG 1.1.1 / 4.1.2 — A)</a:t>
-            </a:r>
-          </a:p>
-          <a:p>
-            <a:pPr>
-              <a:spcAft>
-                <a:spcPts val="600"/>
-              </a:spcAft>
-            </a:pPr>
-            <a:r>
-              <a:rPr sz="1600">
-                <a:latin typeface="Arial"/>
-              </a:rPr>
-              <a:t>Deslizes até o conteúdo principal: 4  (WCAG 2.4.1 — A)</a:t>
-            </a:r>
-          </a:p>
-          <a:p>
-            <a:pPr>
-              <a:spcAft>
-                <a:spcPts val="600"/>
-              </a:spcAft>
-            </a:pPr>
-            <a:r>
-              <a:rPr sz="1600">
-                <a:latin typeface="Arial"/>
-              </a:rPr>
-              <a:t>Sem indicador de foco visível: 0  (WCAG 2.4.7 — AA)</a:t>
-            </a:r>
-          </a:p>
-          <a:p>
-            <a:pPr>
-              <a:spcAft>
-                <a:spcPts val="600"/>
-              </a:spcAft>
-            </a:pPr>
-            <a:r>
-              <a:rPr sz="1600">
-                <a:latin typeface="Arial"/>
-              </a:rPr>
-              <a:t>Alvos de toque menores que 24×24 px: 23  (WCAG 2.5.8 — AA)</a:t>
-            </a:r>
-          </a:p>
-          <a:p>
-            <a:pPr>
-              <a:spcAft>
-                <a:spcPts val="600"/>
-              </a:spcAft>
-            </a:pPr>
-            <a:r>
-              <a:rPr sz="1600">
-                <a:latin typeface="Arial"/>
-              </a:rPr>
-              <a:t>Rolagem horizontal em 320 px: sim  (WCAG 1.4.10 — AA)</a:t>
-            </a:r>
-          </a:p>
-          <a:p>
-            <a:pPr>
-              <a:spcAft>
-                <a:spcPts val="600"/>
-              </a:spcAft>
-            </a:pPr>
-            <a:r>
-              <a:rPr sz="1600">
-                <a:latin typeface="Arial"/>
-              </a:rPr>
-              <a:t>Contraste reprovado em 7 de 51 trechos — pior razão 1:1  (WCAG 1.4.3 — AA)</a:t>
+              <a:t>O tradutor de Libras existe em todas as páginas, injetado por barra.brasil.gov.br. Não aparece no HTML entregue pelo servidor e escapou às três frentes automatizadas — mas a página de Acessibilidade do portal nunca o menciona.</a:t>
             </a:r>
           </a:p>
         </p:txBody>
@@ -13404,7 +13358,7 @@
               <a:rPr sz="2800">
                 <a:latin typeface="Arial"/>
               </a:rPr>
-              <a:t>O que o leitor de tela realmente anuncia</a:t>
+              <a:t>Simulação automatizada em smartphone</a:t>
             </a:r>
           </a:p>
         </p:txBody>
@@ -13433,7 +13387,7 @@
               <a:rPr sz="1600">
                 <a:latin typeface="Arial"/>
               </a:rPr>
-              <a:t>1. lista</a:t>
+              <a:t>Aparelho emulado: Google Pixel 7 (TalkBack) — 412×915 px</a:t>
             </a:r>
           </a:p>
           <a:p>
@@ -13446,7 +13400,7 @@
               <a:rPr sz="1600">
                 <a:latin typeface="Arial"/>
               </a:rPr>
-              <a:t>2. lista</a:t>
+              <a:t>Elementos anunciados SEM RÓTULO: 0  (WCAG 1.1.1 / 4.1.2 — A)</a:t>
             </a:r>
           </a:p>
           <a:p>
@@ -13459,7 +13413,7 @@
               <a:rPr sz="1600">
                 <a:latin typeface="Arial"/>
               </a:rPr>
-              <a:t>3. cabeçalho da página</a:t>
+              <a:t>Deslizes até o conteúdo principal: 4  (WCAG 2.4.1 — A)</a:t>
             </a:r>
           </a:p>
           <a:p>
@@ -13472,7 +13426,7 @@
               <a:rPr sz="1600">
                 <a:latin typeface="Arial"/>
               </a:rPr>
-              <a:t>4. região principal</a:t>
+              <a:t>Sem indicador de foco visível: 0  (WCAG 2.4.7 — AA)</a:t>
             </a:r>
           </a:p>
           <a:p>
@@ -13485,7 +13439,7 @@
               <a:rPr sz="1600">
                 <a:latin typeface="Arial"/>
               </a:rPr>
-              <a:t>5. rodapé da página</a:t>
+              <a:t>Alvos de toque menores que 24×24 px: 23  (WCAG 2.5.8 — AA)</a:t>
             </a:r>
           </a:p>
           <a:p>
@@ -13498,7 +13452,7 @@
               <a:rPr sz="1600">
                 <a:latin typeface="Arial"/>
               </a:rPr>
-              <a:t>6. item de lista</a:t>
+              <a:t>Rolagem horizontal em 320 px: sim  (WCAG 1.4.10 — AA)</a:t>
             </a:r>
           </a:p>
           <a:p>
@@ -13511,33 +13465,7 @@
               <a:rPr sz="1600">
                 <a:latin typeface="Arial"/>
               </a:rPr>
-              <a:t>7. item de lista</a:t>
-            </a:r>
-          </a:p>
-          <a:p>
-            <a:pPr>
-              <a:spcAft>
-                <a:spcPts val="600"/>
-              </a:spcAft>
-            </a:pPr>
-            <a:r>
-              <a:rPr sz="1600">
-                <a:latin typeface="Arial"/>
-              </a:rPr>
-              <a:t>8. item de lista</a:t>
-            </a:r>
-          </a:p>
-          <a:p>
-            <a:pPr>
-              <a:spcAft>
-                <a:spcPts val="600"/>
-              </a:spcAft>
-            </a:pPr>
-            <a:r>
-              <a:rPr sz="1600">
-                <a:latin typeface="Arial"/>
-              </a:rPr>
-              <a:t>9. item de lista</a:t>
+              <a:t>Contraste reprovado em 7 de 51 trechos — pior razão 1:1  (WCAG 1.4.3 — AA)</a:t>
             </a:r>
           </a:p>
         </p:txBody>
@@ -13584,7 +13512,7 @@
               <a:rPr sz="2800">
                 <a:latin typeface="Arial"/>
               </a:rPr>
-              <a:t>Tarefa complementar: uso real com leitor de tela</a:t>
+              <a:t>O que o leitor de tela realmente anuncia</a:t>
             </a:r>
           </a:p>
         </p:txBody>
@@ -13610,10 +13538,10 @@
               </a:spcAft>
             </a:pPr>
             <a:r>
-              <a:rPr sz="1700">
+              <a:rPr sz="1600">
                 <a:latin typeface="Arial"/>
               </a:rPr>
-              <a:t>Aparelho: [PREENCHER: modelo] — [PREENCHER: TalkBack / VoiceOver]</a:t>
+              <a:t>1. lista</a:t>
             </a:r>
           </a:p>
           <a:p>
@@ -13623,10 +13551,10 @@
               </a:spcAft>
             </a:pPr>
             <a:r>
-              <a:rPr sz="1700">
+              <a:rPr sz="1600">
                 <a:latin typeface="Arial"/>
               </a:rPr>
-              <a:t>Tarefa: [PREENCHER: descreva a tarefa]</a:t>
+              <a:t>2. lista</a:t>
             </a:r>
           </a:p>
           <a:p>
@@ -13636,10 +13564,10 @@
               </a:spcAft>
             </a:pPr>
             <a:r>
-              <a:rPr sz="1700">
+              <a:rPr sz="1600">
                 <a:latin typeface="Arial"/>
               </a:rPr>
-              <a:t>Concluída: [PREENCHER: Sim/Não] — tempo: [PREENCHER: ?]</a:t>
+              <a:t>3. cabeçalho da página</a:t>
             </a:r>
           </a:p>
           <a:p>
@@ -13649,23 +13577,75 @@
               </a:spcAft>
             </a:pPr>
             <a:r>
-              <a:rPr sz="1700">
+              <a:rPr sz="1600">
                 <a:latin typeface="Arial"/>
               </a:rPr>
-              <a:t>Relato:</a:t>
-            </a:r>
-          </a:p>
-          <a:p>
-            <a:pPr lvl="1">
+              <a:t>4. região principal</a:t>
+            </a:r>
+          </a:p>
+          <a:p>
+            <a:pPr>
               <a:spcAft>
                 <a:spcPts val="600"/>
               </a:spcAft>
             </a:pPr>
             <a:r>
-              <a:rPr sz="1400">
+              <a:rPr sz="1600">
                 <a:latin typeface="Arial"/>
               </a:rPr>
-              <a:t>[PREENCHER: resuma a experiência em 3 a 4 linhas]</a:t>
+              <a:t>5. rodapé da página</a:t>
+            </a:r>
+          </a:p>
+          <a:p>
+            <a:pPr>
+              <a:spcAft>
+                <a:spcPts val="600"/>
+              </a:spcAft>
+            </a:pPr>
+            <a:r>
+              <a:rPr sz="1600">
+                <a:latin typeface="Arial"/>
+              </a:rPr>
+              <a:t>6. item de lista</a:t>
+            </a:r>
+          </a:p>
+          <a:p>
+            <a:pPr>
+              <a:spcAft>
+                <a:spcPts val="600"/>
+              </a:spcAft>
+            </a:pPr>
+            <a:r>
+              <a:rPr sz="1600">
+                <a:latin typeface="Arial"/>
+              </a:rPr>
+              <a:t>7. item de lista</a:t>
+            </a:r>
+          </a:p>
+          <a:p>
+            <a:pPr>
+              <a:spcAft>
+                <a:spcPts val="600"/>
+              </a:spcAft>
+            </a:pPr>
+            <a:r>
+              <a:rPr sz="1600">
+                <a:latin typeface="Arial"/>
+              </a:rPr>
+              <a:t>8. item de lista</a:t>
+            </a:r>
+          </a:p>
+          <a:p>
+            <a:pPr>
+              <a:spcAft>
+                <a:spcPts val="600"/>
+              </a:spcAft>
+            </a:pPr>
+            <a:r>
+              <a:rPr sz="1600">
+                <a:latin typeface="Arial"/>
+              </a:rPr>
+              <a:t>9. item de lista</a:t>
             </a:r>
           </a:p>
         </p:txBody>
@@ -13712,7 +13692,7 @@
               <a:rPr sz="2800">
                 <a:latin typeface="Arial"/>
               </a:rPr>
-              <a:t>Nível de conformidade WCAG 2.1</a:t>
+              <a:t>Tarefa complementar: uso real com leitor de tela</a:t>
             </a:r>
           </a:p>
         </p:txBody>
@@ -13741,7 +13721,46 @@
               <a:rPr sz="1700">
                 <a:latin typeface="Arial"/>
               </a:rPr>
-              <a:t>Regra do W3C: a conformidade é integral — uma única falha de Nível A</a:t>
+              <a:t>Aparelho: [PREENCHER: modelo] — [PREENCHER: TalkBack / VoiceOver]</a:t>
+            </a:r>
+          </a:p>
+          <a:p>
+            <a:pPr>
+              <a:spcAft>
+                <a:spcPts val="600"/>
+              </a:spcAft>
+            </a:pPr>
+            <a:r>
+              <a:rPr sz="1700">
+                <a:latin typeface="Arial"/>
+              </a:rPr>
+              <a:t>Tarefa: [PREENCHER: descreva a tarefa]</a:t>
+            </a:r>
+          </a:p>
+          <a:p>
+            <a:pPr>
+              <a:spcAft>
+                <a:spcPts val="600"/>
+              </a:spcAft>
+            </a:pPr>
+            <a:r>
+              <a:rPr sz="1700">
+                <a:latin typeface="Arial"/>
+              </a:rPr>
+              <a:t>Concluída: [PREENCHER: Sim/Não] — tempo: [PREENCHER: ?]</a:t>
+            </a:r>
+          </a:p>
+          <a:p>
+            <a:pPr>
+              <a:spcAft>
+                <a:spcPts val="600"/>
+              </a:spcAft>
+            </a:pPr>
+            <a:r>
+              <a:rPr sz="1700">
+                <a:latin typeface="Arial"/>
+              </a:rPr>
+              <a:t>Relato:</a:t>
             </a:r>
           </a:p>
           <a:p>
@@ -13754,59 +13773,7 @@
               <a:rPr sz="1400">
                 <a:latin typeface="Arial"/>
               </a:rPr>
-              <a:t>impede a conformidade em qualquer nível</a:t>
-            </a:r>
-          </a:p>
-          <a:p>
-            <a:pPr>
-              <a:spcAft>
-                <a:spcPts val="600"/>
-              </a:spcAft>
-            </a:pPr>
-            <a:r>
-              <a:rPr sz="1700">
-                <a:latin typeface="Arial"/>
-              </a:rPr>
-              <a:t>Falhas em critérios de Nível A: 1.4.1 Uso de cores (marcador do slide ativo diferenciado apenas pela cor de fundo) e 2.2.2 Pausar, Parar, Ocultar (banner rotativo com avanço automático a cada 4 segundos, sem mecanismo de pausa).</a:t>
-            </a:r>
-          </a:p>
-          <a:p>
-            <a:pPr>
-              <a:spcAft>
-                <a:spcPts val="600"/>
-              </a:spcAft>
-            </a:pPr>
-            <a:r>
-              <a:rPr sz="1700">
-                <a:latin typeface="Arial"/>
-              </a:rPr>
-              <a:t>Falhas em critérios de Nível AA: 1.4.3 Contraste mínimo (4 reprovações confirmadas por amostragem de pixels, a pior em 1,66:1); 1.4.10 Reflow (conteúdo de 330 px em tela de 320 px, gerando rolagem horizontal); 1.4.11 Contraste não textual (indicador de foco em 1,56:1 sobre o fundo branco do conteúdo); 1.4.12 Espaçamento de texto (rolagem horizontal e 3 elementos cortados); 2.5.8 Tamanho do alvo (23 dos 51 alvos interativos da versão móvel medem menos de 24x24 px).</a:t>
-            </a:r>
-          </a:p>
-          <a:p>
-            <a:pPr>
-              <a:spcAft>
-                <a:spcPts val="600"/>
-              </a:spcAft>
-            </a:pPr>
-            <a:r>
-              <a:rPr sz="1700">
-                <a:latin typeface="Arial"/>
-              </a:rPr>
-              <a:t>Resultado: Não atinge o Nível A</a:t>
-            </a:r>
-          </a:p>
-          <a:p>
-            <a:pPr>
-              <a:spcAft>
-                <a:spcPts val="600"/>
-              </a:spcAft>
-            </a:pPr>
-            <a:r>
-              <a:rPr sz="1700">
-                <a:latin typeface="Arial"/>
-              </a:rPr>
-              <a:t>Nível AA é o patamar exigido da administração pública brasileira</a:t>
+              <a:t>[PREENCHER: resuma a experiência em 3 a 4 linhas]</a:t>
             </a:r>
           </a:p>
         </p:txBody>
@@ -13853,7 +13820,7 @@
               <a:rPr sz="2800">
                 <a:latin typeface="Arial"/>
               </a:rPr>
-              <a:t>Recomendações priorizadas</a:t>
+              <a:t>Nível de conformidade WCAG 2.1</a:t>
             </a:r>
           </a:p>
         </p:txBody>
@@ -13879,10 +13846,23 @@
               </a:spcAft>
             </a:pPr>
             <a:r>
-              <a:rPr sz="1500">
+              <a:rPr sz="1700">
                 <a:latin typeface="Arial"/>
               </a:rPr>
-              <a:t>[Crítica] Banner rotativo sem controle de pausa → WCAG 2.2.2 (A)</a:t>
+              <a:t>Regra do W3C: a conformidade é integral — uma única falha de Nível A</a:t>
+            </a:r>
+          </a:p>
+          <a:p>
+            <a:pPr lvl="1">
+              <a:spcAft>
+                <a:spcPts val="600"/>
+              </a:spcAft>
+            </a:pPr>
+            <a:r>
+              <a:rPr sz="1400">
+                <a:latin typeface="Arial"/>
+              </a:rPr>
+              <a:t>impede a conformidade em qualquer nível</a:t>
             </a:r>
           </a:p>
           <a:p>
@@ -13892,10 +13872,10 @@
               </a:spcAft>
             </a:pPr>
             <a:r>
-              <a:rPr sz="1500">
+              <a:rPr sz="1700">
                 <a:latin typeface="Arial"/>
               </a:rPr>
-              <a:t>[Crítica] Slide ativo identificado apenas pela cor → WCAG 1.4.1 (A)</a:t>
+              <a:t>Falhas em critérios de Nível A: 1.4.1 Uso de cores (marcador do slide ativo diferenciado apenas pela cor de fundo) e 2.2.2 Pausar, Parar, Ocultar (banner rotativo com avanço automático a cada 4 segundos, sem mecanismo de pausa).</a:t>
             </a:r>
           </a:p>
           <a:p>
@@ -13905,10 +13885,10 @@
               </a:spcAft>
             </a:pPr>
             <a:r>
-              <a:rPr sz="1500">
+              <a:rPr sz="1700">
                 <a:latin typeface="Arial"/>
               </a:rPr>
-              <a:t>[Alta] Contraste insuficiente nos controles do banner → WCAG 1.4.3 (AA)</a:t>
+              <a:t>Falhas em critérios de Nível AA: 1.4.3 Contraste mínimo (4 reprovações confirmadas por amostragem de pixels, a pior em 1,66:1); 1.4.10 Reflow (conteúdo de 330 px em tela de 320 px, gerando rolagem horizontal); 1.4.11 Contraste não textual (indicador de foco em 1,56:1 sobre o fundo branco do conteúdo); 1.4.12 Espaçamento de texto (rolagem horizontal e 3 elementos cortados); 2.5.8 Tamanho do alvo (23 dos 51 alvos interativos da versão móvel medem menos de 24x24 px).</a:t>
             </a:r>
           </a:p>
           <a:p>
@@ -13918,10 +13898,10 @@
               </a:spcAft>
             </a:pPr>
             <a:r>
-              <a:rPr sz="1500">
+              <a:rPr sz="1700">
                 <a:latin typeface="Arial"/>
               </a:rPr>
-              <a:t>[Alta] Página inicial e página de contato sem &lt;h1&gt; → WCAG 1.3.1 / 2.4.6 (A/AA)</a:t>
+              <a:t>Resultado: Não atinge o Nível A</a:t>
             </a:r>
           </a:p>
           <a:p>
@@ -13931,49 +13911,10 @@
               </a:spcAft>
             </a:pPr>
             <a:r>
-              <a:rPr sz="1500">
+              <a:rPr sz="1700">
                 <a:latin typeface="Arial"/>
               </a:rPr>
-              <a:t>[Alta] Ausência de região de navegação → WCAG 1.3.1 (A)</a:t>
-            </a:r>
-          </a:p>
-          <a:p>
-            <a:pPr>
-              <a:spcAft>
-                <a:spcPts val="600"/>
-              </a:spcAft>
-            </a:pPr>
-            <a:r>
-              <a:rPr sz="1500">
-                <a:latin typeface="Arial"/>
-              </a:rPr>
-              <a:t>[Alta] Rolagem horizontal em telas estreitas → WCAG 1.4.10 (AA)</a:t>
-            </a:r>
-          </a:p>
-          <a:p>
-            <a:pPr>
-              <a:spcAft>
-                <a:spcPts val="600"/>
-              </a:spcAft>
-            </a:pPr>
-            <a:r>
-              <a:rPr sz="1500">
-                <a:latin typeface="Arial"/>
-              </a:rPr>
-              <a:t>[Média] Indicador de foco pouco perceptível sobre fundo branco → WCAG 1.4.11 (AA)</a:t>
-            </a:r>
-          </a:p>
-          <a:p>
-            <a:pPr>
-              <a:spcAft>
-                <a:spcPts val="600"/>
-              </a:spcAft>
-            </a:pPr>
-            <a:r>
-              <a:rPr sz="1500">
-                <a:latin typeface="Arial"/>
-              </a:rPr>
-              <a:t>[Média] Alvos de toque abaixo do mínimo → WCAG 2.5.8 (AA)</a:t>
+              <a:t>Nível AA é o patamar exigido da administração pública brasileira</a:t>
             </a:r>
           </a:p>
         </p:txBody>
@@ -14020,7 +13961,7 @@
               <a:rPr sz="2800">
                 <a:latin typeface="Arial"/>
               </a:rPr>
-              <a:t>Conclusão</a:t>
+              <a:t>Recomendações priorizadas</a:t>
             </a:r>
           </a:p>
         </p:txBody>
@@ -14046,23 +13987,10 @@
               </a:spcAft>
             </a:pPr>
             <a:r>
-              <a:rPr sz="1700">
+              <a:rPr sz="1500">
                 <a:latin typeface="Arial"/>
               </a:rPr>
-              <a:t>Boa aparência visual não significa boa acessibilidade:</a:t>
-            </a:r>
-          </a:p>
-          <a:p>
-            <a:pPr lvl="1">
-              <a:spcAft>
-                <a:spcPts val="600"/>
-              </a:spcAft>
-            </a:pPr>
-            <a:r>
-              <a:rPr sz="1400">
-                <a:latin typeface="Arial"/>
-              </a:rPr>
-              <a:t>as barreiras estão na camada de marcação, invisíveis ao usuário vidente</a:t>
+              <a:t>[Crítica] Banner rotativo sem controle de pausa → WCAG 2.2.2 (A)</a:t>
             </a:r>
           </a:p>
           <a:p>
@@ -14072,10 +14000,10 @@
               </a:spcAft>
             </a:pPr>
             <a:r>
-              <a:rPr sz="1700">
+              <a:rPr sz="1500">
                 <a:latin typeface="Arial"/>
               </a:rPr>
-              <a:t>Ferramentas automáticas quantificam; só o teste humano revela a experiência</a:t>
+              <a:t>[Crítica] Slide ativo identificado apenas pela cor → WCAG 1.4.1 (A)</a:t>
             </a:r>
           </a:p>
           <a:p>
@@ -14085,23 +14013,10 @@
               </a:spcAft>
             </a:pPr>
             <a:r>
-              <a:rPr sz="1700">
+              <a:rPr sz="1500">
                 <a:latin typeface="Arial"/>
               </a:rPr>
-              <a:t>A maior parte das correções é de baixo custo — atributos alt, labels,</a:t>
-            </a:r>
-          </a:p>
-          <a:p>
-            <a:pPr lvl="1">
-              <a:spcAft>
-                <a:spcPts val="600"/>
-              </a:spcAft>
-            </a:pPr>
-            <a:r>
-              <a:rPr sz="1400">
-                <a:latin typeface="Arial"/>
-              </a:rPr>
-              <a:t>hierarquia de cabeçalhos e elementos semânticos de região</a:t>
+              <a:t>[Alta] Contraste insuficiente nos controles do banner → WCAG 1.4.3 (AA)</a:t>
             </a:r>
           </a:p>
           <a:p>
@@ -14111,10 +14026,10 @@
               </a:spcAft>
             </a:pPr>
             <a:r>
-              <a:rPr sz="1700">
+              <a:rPr sz="1500">
                 <a:latin typeface="Arial"/>
               </a:rPr>
-              <a:t>Acessibilidade se projeta desde o início; corrigir depois custa mais</a:t>
+              <a:t>[Alta] Página inicial e página de contato sem &lt;h1&gt; → WCAG 1.3.1 / 2.4.6 (A/AA)</a:t>
             </a:r>
           </a:p>
           <a:p>
@@ -14124,10 +14039,49 @@
               </a:spcAft>
             </a:pPr>
             <a:r>
-              <a:rPr sz="1700">
+              <a:rPr sz="1500">
                 <a:latin typeface="Arial"/>
               </a:rPr>
-              <a:t>Recomenda-se reavaliação periódica: cada publicação pode reintroduzir barreiras</a:t>
+              <a:t>[Alta] Ausência de região de navegação → WCAG 1.3.1 (A)</a:t>
+            </a:r>
+          </a:p>
+          <a:p>
+            <a:pPr>
+              <a:spcAft>
+                <a:spcPts val="600"/>
+              </a:spcAft>
+            </a:pPr>
+            <a:r>
+              <a:rPr sz="1500">
+                <a:latin typeface="Arial"/>
+              </a:rPr>
+              <a:t>[Alta] Rolagem horizontal em telas estreitas → WCAG 1.4.10 (AA)</a:t>
+            </a:r>
+          </a:p>
+          <a:p>
+            <a:pPr>
+              <a:spcAft>
+                <a:spcPts val="600"/>
+              </a:spcAft>
+            </a:pPr>
+            <a:r>
+              <a:rPr sz="1500">
+                <a:latin typeface="Arial"/>
+              </a:rPr>
+              <a:t>[Média] Indicador de foco pouco perceptível sobre fundo branco → WCAG 1.4.11 (AA)</a:t>
+            </a:r>
+          </a:p>
+          <a:p>
+            <a:pPr>
+              <a:spcAft>
+                <a:spcPts val="600"/>
+              </a:spcAft>
+            </a:pPr>
+            <a:r>
+              <a:rPr sz="1500">
+                <a:latin typeface="Arial"/>
+              </a:rPr>
+              <a:t>[Média] Alvos de toque abaixo do mínimo → WCAG 2.5.8 (AA)</a:t>
             </a:r>
           </a:p>
         </p:txBody>
@@ -14308,6 +14262,160 @@
 </file>
 
 <file path=ppt/slides/slide20.xml><?xml version="1.0" encoding="utf-8"?>
+<p:sld xmlns:a="http://schemas.openxmlformats.org/drawingml/2006/main" xmlns:p="http://schemas.openxmlformats.org/presentationml/2006/main" xmlns:r="http://schemas.openxmlformats.org/officeDocument/2006/relationships">
+  <p:cSld>
+    <p:spTree>
+      <p:nvGrpSpPr>
+        <p:cNvPr id="1" name=""/>
+        <p:cNvGrpSpPr/>
+        <p:nvPr/>
+      </p:nvGrpSpPr>
+      <p:grpSpPr/>
+      <p:sp>
+        <p:nvSpPr>
+          <p:cNvPr id="2" name="Title 1"/>
+          <p:cNvSpPr>
+            <a:spLocks noGrp="1"/>
+          </p:cNvSpPr>
+          <p:nvPr>
+            <p:ph type="title"/>
+          </p:nvPr>
+        </p:nvSpPr>
+        <p:spPr/>
+        <p:txBody>
+          <a:bodyPr wrap="square"/>
+          <a:lstStyle/>
+          <a:p>
+            <a:pPr>
+              <a:spcAft>
+                <a:spcPts val="0"/>
+              </a:spcAft>
+            </a:pPr>
+            <a:r>
+              <a:rPr sz="2800">
+                <a:latin typeface="Arial"/>
+              </a:rPr>
+              <a:t>Conclusão</a:t>
+            </a:r>
+          </a:p>
+        </p:txBody>
+      </p:sp>
+      <p:sp>
+        <p:nvSpPr>
+          <p:cNvPr id="3" name="Content Placeholder 2"/>
+          <p:cNvSpPr>
+            <a:spLocks noGrp="1"/>
+          </p:cNvSpPr>
+          <p:nvPr>
+            <p:ph idx="1"/>
+          </p:nvPr>
+        </p:nvSpPr>
+        <p:spPr/>
+        <p:txBody>
+          <a:bodyPr wrap="square"/>
+          <a:lstStyle/>
+          <a:p>
+            <a:pPr>
+              <a:spcAft>
+                <a:spcPts val="600"/>
+              </a:spcAft>
+            </a:pPr>
+            <a:r>
+              <a:rPr sz="1700">
+                <a:latin typeface="Arial"/>
+              </a:rPr>
+              <a:t>Boa aparência visual não significa boa acessibilidade:</a:t>
+            </a:r>
+          </a:p>
+          <a:p>
+            <a:pPr lvl="1">
+              <a:spcAft>
+                <a:spcPts val="600"/>
+              </a:spcAft>
+            </a:pPr>
+            <a:r>
+              <a:rPr sz="1400">
+                <a:latin typeface="Arial"/>
+              </a:rPr>
+              <a:t>as barreiras estão na camada de marcação, invisíveis ao usuário vidente</a:t>
+            </a:r>
+          </a:p>
+          <a:p>
+            <a:pPr>
+              <a:spcAft>
+                <a:spcPts val="600"/>
+              </a:spcAft>
+            </a:pPr>
+            <a:r>
+              <a:rPr sz="1700">
+                <a:latin typeface="Arial"/>
+              </a:rPr>
+              <a:t>Ferramentas automáticas quantificam; só o teste humano revela a experiência</a:t>
+            </a:r>
+          </a:p>
+          <a:p>
+            <a:pPr>
+              <a:spcAft>
+                <a:spcPts val="600"/>
+              </a:spcAft>
+            </a:pPr>
+            <a:r>
+              <a:rPr sz="1700">
+                <a:latin typeface="Arial"/>
+              </a:rPr>
+              <a:t>A maior parte das correções é de baixo custo — atributos alt, labels,</a:t>
+            </a:r>
+          </a:p>
+          <a:p>
+            <a:pPr lvl="1">
+              <a:spcAft>
+                <a:spcPts val="600"/>
+              </a:spcAft>
+            </a:pPr>
+            <a:r>
+              <a:rPr sz="1400">
+                <a:latin typeface="Arial"/>
+              </a:rPr>
+              <a:t>hierarquia de cabeçalhos e elementos semânticos de região</a:t>
+            </a:r>
+          </a:p>
+          <a:p>
+            <a:pPr>
+              <a:spcAft>
+                <a:spcPts val="600"/>
+              </a:spcAft>
+            </a:pPr>
+            <a:r>
+              <a:rPr sz="1700">
+                <a:latin typeface="Arial"/>
+              </a:rPr>
+              <a:t>Acessibilidade se projeta desde o início; corrigir depois custa mais</a:t>
+            </a:r>
+          </a:p>
+          <a:p>
+            <a:pPr>
+              <a:spcAft>
+                <a:spcPts val="600"/>
+              </a:spcAft>
+            </a:pPr>
+            <a:r>
+              <a:rPr sz="1700">
+                <a:latin typeface="Arial"/>
+              </a:rPr>
+              <a:t>Recomenda-se reavaliação periódica: cada publicação pode reintroduzir barreiras</a:t>
+            </a:r>
+          </a:p>
+        </p:txBody>
+      </p:sp>
+    </p:spTree>
+  </p:cSld>
+  <p:clrMapOvr>
+    <a:masterClrMapping/>
+  </p:clrMapOvr>
+</p:sld>
+</file>
+
+<file path=ppt/slides/slide21.xml><?xml version="1.0" encoding="utf-8"?>
 <p:sld xmlns:a="http://schemas.openxmlformats.org/drawingml/2006/main" xmlns:p="http://schemas.openxmlformats.org/presentationml/2006/main" xmlns:r="http://schemas.openxmlformats.org/officeDocument/2006/relationships">
   <p:cSld>
     <p:spTree>

--- a/apresentacao/APRESENTACAO_AVALIACAO_ACESSIBILIDADE.pptx
+++ b/apresentacao/APRESENTACAO_AVALIACAO_ACESSIBILIDADE.pptx
@@ -12951,8 +12951,8 @@
         </p:blipFill>
         <p:spPr>
           <a:xfrm>
-            <a:off x="853440" y="1371600"/>
-            <a:ext cx="10485120" cy="2763281"/>
+            <a:off x="1219200" y="2206816"/>
+            <a:ext cx="9753600" cy="2570494"/>
           </a:xfrm>
           <a:prstGeom prst="rect">
             <a:avLst/>
@@ -12967,8 +12967,8 @@
         </p:nvSpPr>
         <p:spPr>
           <a:xfrm>
-            <a:off x="853440" y="4272041"/>
-            <a:ext cx="10485120" cy="822960"/>
+            <a:off x="975360" y="4868750"/>
+            <a:ext cx="10241280" cy="868680"/>
           </a:xfrm>
           <a:prstGeom prst="rect">
             <a:avLst/>
@@ -12987,7 +12987,7 @@
               </a:spcAft>
             </a:pPr>
             <a:r>
-              <a:rPr sz="1400">
+              <a:rPr sz="1300">
                 <a:latin typeface="Arial"/>
               </a:rPr>
               <a:t>Quatro atalhos de salto (Alt+1 a Alt+4), Alto Contraste e Mapa do site: o portal acerta o essencial da navegação assistida.</a:t>
@@ -13058,8 +13058,8 @@
         </p:blipFill>
         <p:spPr>
           <a:xfrm>
-            <a:off x="3352800" y="1371600"/>
-            <a:ext cx="5486400" cy="4251960"/>
+            <a:off x="3744165" y="2206816"/>
+            <a:ext cx="4703669" cy="3645344"/>
           </a:xfrm>
           <a:prstGeom prst="rect">
             <a:avLst/>
@@ -13074,8 +13074,8 @@
         </p:nvSpPr>
         <p:spPr>
           <a:xfrm>
-            <a:off x="853440" y="5760720"/>
-            <a:ext cx="10485120" cy="822960"/>
+            <a:off x="975360" y="5943600"/>
+            <a:ext cx="10241280" cy="868680"/>
           </a:xfrm>
           <a:prstGeom prst="rect">
             <a:avLst/>
@@ -13094,7 +13094,7 @@
               </a:spcAft>
             </a:pPr>
             <a:r>
-              <a:rPr sz="1400">
+              <a:rPr sz="1300">
                 <a:latin typeface="Arial"/>
               </a:rPr>
               <a:t>Botões de 22x20 px, contraste de 1,66:1, slide ativo marcado só pela cor e troca automática a cada 4 segundos sem botão de pausa.</a:t>
@@ -13165,8 +13165,8 @@
         </p:blipFill>
         <p:spPr>
           <a:xfrm>
-            <a:off x="5245608" y="1371600"/>
-            <a:ext cx="1700784" cy="4251960"/>
+            <a:off x="5366931" y="2206816"/>
+            <a:ext cx="1458137" cy="3645344"/>
           </a:xfrm>
           <a:prstGeom prst="rect">
             <a:avLst/>
@@ -13181,8 +13181,8 @@
         </p:nvSpPr>
         <p:spPr>
           <a:xfrm>
-            <a:off x="853440" y="5760720"/>
-            <a:ext cx="10485120" cy="822960"/>
+            <a:off x="975360" y="5943600"/>
+            <a:ext cx="10241280" cy="868680"/>
           </a:xfrm>
           <a:prstGeom prst="rect">
             <a:avLst/>
@@ -13201,7 +13201,7 @@
               </a:spcAft>
             </a:pPr>
             <a:r>
-              <a:rPr sz="1400">
+              <a:rPr sz="1300">
                 <a:latin typeface="Arial"/>
               </a:rPr>
               <a:t>O conteúdo ocupa 330 px em uma tela de 320 px e obriga a rolagem horizontal — WCAG 1.4.10 (AA).</a:t>
@@ -13272,8 +13272,8 @@
         </p:blipFill>
         <p:spPr>
           <a:xfrm>
-            <a:off x="853440" y="1371600"/>
-            <a:ext cx="10485120" cy="3640666"/>
+            <a:off x="1219200" y="2206816"/>
+            <a:ext cx="9753600" cy="3386666"/>
           </a:xfrm>
           <a:prstGeom prst="rect">
             <a:avLst/>
@@ -13288,8 +13288,8 @@
         </p:nvSpPr>
         <p:spPr>
           <a:xfrm>
-            <a:off x="853440" y="5149426"/>
-            <a:ext cx="10485120" cy="822960"/>
+            <a:off x="975360" y="5684922"/>
+            <a:ext cx="10241280" cy="868680"/>
           </a:xfrm>
           <a:prstGeom prst="rect">
             <a:avLst/>
@@ -13308,7 +13308,7 @@
               </a:spcAft>
             </a:pPr>
             <a:r>
-              <a:rPr sz="1400">
+              <a:rPr sz="1300">
                 <a:latin typeface="Arial"/>
               </a:rPr>
               <a:t>O tradutor de Libras existe em todas as páginas, injetado por barra.brasil.gov.br. Não aparece no HTML entregue pelo servidor e escapou às três frentes automatizadas — mas a página de Acessibilidade do portal nunca o menciona.</a:t>

--- a/apresentacao/APRESENTACAO_AVALIACAO_ACESSIBILIDADE.pptx
+++ b/apresentacao/APRESENTACAO_AVALIACAO_ACESSIBILIDADE.pptx
@@ -13721,7 +13721,7 @@
               <a:rPr sz="1700">
                 <a:latin typeface="Arial"/>
               </a:rPr>
-              <a:t>Aparelho: [PREENCHER: modelo] — [PREENCHER: TalkBack / VoiceOver]</a:t>
+              <a:t>Aparelho: Samsung Galaxy A15 5G — TalkBack</a:t>
             </a:r>
           </a:p>
           <a:p>
@@ -13734,7 +13734,7 @@
               <a:rPr sz="1700">
                 <a:latin typeface="Arial"/>
               </a:rPr>
-              <a:t>Tarefa: [PREENCHER: descreva a tarefa]</a:t>
+              <a:t>Tarefa: Localizar, a partir da página inicial, o edital mais recente publicado pelo campus e abrir o documento correspondente.</a:t>
             </a:r>
           </a:p>
           <a:p>
@@ -13747,7 +13747,7 @@
               <a:rPr sz="1700">
                 <a:latin typeface="Arial"/>
               </a:rPr>
-              <a:t>Concluída: [PREENCHER: Sim/Não] — tempo: [PREENCHER: ?]</a:t>
+              <a:t>Concluída: Sim, na segunda tentativa — tempo: primeira tentativa abandonada aos 12 min 4 s; segunda tentativa concluída em 10 min 16 s</a:t>
             </a:r>
           </a:p>
           <a:p>
@@ -13773,7 +13773,7 @@
               <a:rPr sz="1400">
                 <a:latin typeface="Arial"/>
               </a:rPr>
-              <a:t>[PREENCHER: resuma a experiência em 3 a 4 linhas]</a:t>
+              <a:t>A primeira tentativa não chegou ao edital. Foram necessários 5 min 30 s apenas para concluir o tutorial do TalkBack, seguidos de 5 min de tentativas frustradas para sair da própria tela de configuração do aparelho e 8 min 46 s para conseguir desativar o leitor. Já no portal, a busca pelo edital foi abandonada aos 12 mi</a:t>
             </a:r>
           </a:p>
         </p:txBody>
@@ -14042,7 +14042,7 @@
               <a:rPr sz="1500">
                 <a:latin typeface="Arial"/>
               </a:rPr>
-              <a:t>[Alta] Ausência de região de navegação → WCAG 1.3.1 (A)</a:t>
+              <a:t>[Alta] Ausência de região de navegação no código do campus → WCAG 1.3.1 (A)</a:t>
             </a:r>
           </a:p>
           <a:p>
@@ -15282,7 +15282,7 @@
               <a:rPr sz="1300">
                 <a:latin typeface="Arial"/>
               </a:rPr>
-              <a:t>Errors: [PREENCHER: ?]   |   Contrast Errors: [PREENCHER: ?]   |   Alerts: [PREENCHER: ?]</a:t>
+              <a:t>Errors: 4   |   Contrast Errors: 21   |   Alerts: 32</a:t>
             </a:r>
           </a:p>
           <a:p>
@@ -15295,7 +15295,7 @@
               <a:rPr sz="1300">
                 <a:latin typeface="Arial"/>
               </a:rPr>
-              <a:t>Principais erros: [PREENCHER: listar]</a:t>
+              <a:t>Principais erros: os 4 erros dividem-se em 1 "Missing alternative text" e 3 "Empty link"; os 21 erros de contraste são todos da categoria "Very low contrast". Entre os </a:t>
             </a:r>
           </a:p>
           <a:p>
@@ -15321,7 +15321,7 @@
               <a:rPr sz="1300">
                 <a:latin typeface="Arial"/>
               </a:rPr>
-              <a:t>Nota geral: [PREENCHER: ?]%</a:t>
+              <a:t>Nota geral: 90,48%</a:t>
             </a:r>
           </a:p>
           <a:p>
@@ -15334,7 +15334,7 @@
               <a:rPr sz="1300">
                 <a:latin typeface="Arial"/>
               </a:rPr>
-              <a:t>Marcação [PREENCHER: ?] erros · Conteúdo [PREENCHER: ?] erros · Formulários [PREENCHER: ?] erros</a:t>
+              <a:t>Marcação 29 erros · Conteúdo 11 erros · Formulários 0 erros</a:t>
             </a:r>
           </a:p>
           <a:p>

--- a/apresentacao/APRESENTACAO_AVALIACAO_ACESSIBILIDADE.pptx
+++ b/apresentacao/APRESENTACAO_AVALIACAO_ACESSIBILIDADE.pptx
@@ -12861,19 +12861,6 @@
             </a:r>
           </a:p>
           <a:p>
-            <a:pPr lvl="1">
-              <a:spcAft>
-                <a:spcPts val="600"/>
-              </a:spcAft>
-            </a:pPr>
-            <a:r>
-              <a:rPr sz="1200">
-                <a:latin typeface="Arial"/>
-              </a:rPr>
-              <a:t>4.0:1 (exige 4.5:1) — Barra do Governo Federal (barra.brasil.gov.br)</a:t>
-            </a:r>
-          </a:p>
-          <a:p>
             <a:pPr>
               <a:spcAft>
                 <a:spcPts val="600"/>
@@ -13204,7 +13191,7 @@
               <a:rPr sz="1300">
                 <a:latin typeface="Arial"/>
               </a:rPr>
-              <a:t>O conteúdo ocupa 330 px em uma tela de 320 px e obriga a rolagem horizontal — WCAG 1.4.10 (AA).</a:t>
+              <a:t>Com a Barra do Governo Federal carregada, o conteúdo cabe em 320 px: 1.4.10 atendido. Os 330 px da imagem vêm da marcação provisória da barra, visível só quando o script de terceiro falha.</a:t>
             </a:r>
           </a:p>
         </p:txBody>
@@ -13400,7 +13387,7 @@
               <a:rPr sz="1600">
                 <a:latin typeface="Arial"/>
               </a:rPr>
-              <a:t>Elementos anunciados SEM RÓTULO: 0  (WCAG 1.1.1 / 4.1.2 — A)</a:t>
+              <a:t>Elementos anunciados SEM RÓTULO: 3  (WCAG 1.1.1 / 4.1.2 — A)</a:t>
             </a:r>
           </a:p>
           <a:p>
@@ -13413,7 +13400,7 @@
               <a:rPr sz="1600">
                 <a:latin typeface="Arial"/>
               </a:rPr>
-              <a:t>Deslizes até o conteúdo principal: 4  (WCAG 2.4.1 — A)</a:t>
+              <a:t>Deslizes até o conteúdo principal: 5  (WCAG 2.4.1 — A)</a:t>
             </a:r>
           </a:p>
           <a:p>
@@ -13426,7 +13413,7 @@
               <a:rPr sz="1600">
                 <a:latin typeface="Arial"/>
               </a:rPr>
-              <a:t>Sem indicador de foco visível: 0  (WCAG 2.4.7 — AA)</a:t>
+              <a:t>Sem indicador de foco visível: 1  (WCAG 2.4.7 — AA)</a:t>
             </a:r>
           </a:p>
           <a:p>
@@ -13439,7 +13426,7 @@
               <a:rPr sz="1600">
                 <a:latin typeface="Arial"/>
               </a:rPr>
-              <a:t>Alvos de toque menores que 24×24 px: 23  (WCAG 2.5.8 — AA)</a:t>
+              <a:t>Alvos de toque menores que 24×24 px: 23  (WCAG 2.2, 2.5.8 — AA)</a:t>
             </a:r>
           </a:p>
           <a:p>
@@ -13452,7 +13439,7 @@
               <a:rPr sz="1600">
                 <a:latin typeface="Arial"/>
               </a:rPr>
-              <a:t>Rolagem horizontal em 320 px: sim  (WCAG 1.4.10 — AA)</a:t>
+              <a:t>Rolagem horizontal em 320 px: não  (WCAG 1.4.10 — AA)</a:t>
             </a:r>
           </a:p>
           <a:p>
@@ -13465,7 +13452,7 @@
               <a:rPr sz="1600">
                 <a:latin typeface="Arial"/>
               </a:rPr>
-              <a:t>Contraste reprovado em 7 de 51 trechos — pior razão 1:1  (WCAG 1.4.3 — AA)</a:t>
+              <a:t>Contraste reprovado em 0 de 56 trechos — pior razão 4.65:1  (WCAG 1.4.3 — AA)</a:t>
             </a:r>
           </a:p>
         </p:txBody>
@@ -13567,7 +13554,7 @@
               <a:rPr sz="1600">
                 <a:latin typeface="Arial"/>
               </a:rPr>
-              <a:t>3. cabeçalho da página</a:t>
+              <a:t>3. lista</a:t>
             </a:r>
           </a:p>
           <a:p>
@@ -13580,7 +13567,7 @@
               <a:rPr sz="1600">
                 <a:latin typeface="Arial"/>
               </a:rPr>
-              <a:t>4. região principal</a:t>
+              <a:t>4. cabeçalho da página</a:t>
             </a:r>
           </a:p>
           <a:p>
@@ -13593,7 +13580,7 @@
               <a:rPr sz="1600">
                 <a:latin typeface="Arial"/>
               </a:rPr>
-              <a:t>5. rodapé da página</a:t>
+              <a:t>5. região principal</a:t>
             </a:r>
           </a:p>
           <a:p>
@@ -13606,7 +13593,7 @@
               <a:rPr sz="1600">
                 <a:latin typeface="Arial"/>
               </a:rPr>
-              <a:t>6. item de lista</a:t>
+              <a:t>6. rodapé da página</a:t>
             </a:r>
           </a:p>
           <a:p>
@@ -13875,7 +13862,7 @@
               <a:rPr sz="1700">
                 <a:latin typeface="Arial"/>
               </a:rPr>
-              <a:t>Falhas em critérios de Nível A: 1.4.1 Uso de cores (marcador do slide ativo diferenciado apenas pela cor de fundo) e 2.2.2 Pausar, Parar, Ocultar (banner rotativo com avanço automático a cada 4 segundos, sem mecanismo de pausa).</a:t>
+              <a:t>Falhas em critérios de Nível A: 1.3.1 Informações e relações (a página de contato não declara nenhum elemento de cabeçalho, embora apresente seções visualmente tituladas, de modo que a estrutura percebida por quem enxerga não é programaticamente determinável); 1.4.1 Uso de cores (marcador do slide ativo diferenciado apenas pela cor de fundo); e 2.2.2 Pausar, Parar, Ocultar (banner rotativo com avanço automático a cada 4 segundos, sem mecanismo de pausa).</a:t>
             </a:r>
           </a:p>
           <a:p>
@@ -13888,7 +13875,7 @@
               <a:rPr sz="1700">
                 <a:latin typeface="Arial"/>
               </a:rPr>
-              <a:t>Falhas em critérios de Nível AA: 1.4.3 Contraste mínimo (4 reprovações confirmadas por amostragem de pixels, a pior em 1,66:1); 1.4.10 Reflow (conteúdo de 330 px em tela de 320 px, gerando rolagem horizontal); 1.4.11 Contraste não textual (indicador de foco em 1,56:1 sobre o fundo branco do conteúdo); 1.4.12 Espaçamento de texto (rolagem horizontal e 3 elementos cortados); 2.5.8 Tamanho do alvo (23 dos 51 alvos interativos da versão móvel medem menos de 24x24 px).</a:t>
+              <a:t>Falhas em critérios de Nível AA: 1.4.3 Contraste mínimo (3 reprovações confirmadas por amostragem de pixels, a pior em 1,66:1); 1.4.11 Contraste não textual (indicador de foco de 2 px na cor rgb(241,202,127), que atinge apenas 1,56:1 sobre o fundo branco da área de conteúdo, onde exige-se 3:1); e 1.4.12 Espaçamento de texto (3 elementos com conteúdo cortado sob o espaçamento exigido pelo critério). Acrescenta-se o critério 2.5.8 Tamanho do alvo (mínimo), que mede 23 dos 58 alvos interativos da versão móvel abaixo de 24 por 24 pixels: ele pertence à WCAG 2.2, e não à 2.1, e é aqui adotado como complemento, conforme facultado pelo enunciado do trabalho ao admitir "WCAG 2.1 ou mais recentes". Na WCAG 2.1 o requisito equivalente é o 2.5.5 Tamanho do alvo, de Nível AAA, que o sítio também não cumpre. O critério 1.4.10 Reflow, registrado como falho na primeira medição, foi reclassificado como atendido — ver a nota de reconferência.</a:t>
             </a:r>
           </a:p>
           <a:p>
@@ -14055,7 +14042,7 @@
               <a:rPr sz="1500">
                 <a:latin typeface="Arial"/>
               </a:rPr>
-              <a:t>[Alta] Rolagem horizontal em telas estreitas → WCAG 1.4.10 (AA)</a:t>
+              <a:t>[Média] Indicador de foco pouco perceptível sobre fundo branco → WCAG 1.4.11 (AA)</a:t>
             </a:r>
           </a:p>
           <a:p>
@@ -14068,7 +14055,7 @@
               <a:rPr sz="1500">
                 <a:latin typeface="Arial"/>
               </a:rPr>
-              <a:t>[Média] Indicador de foco pouco perceptível sobre fundo branco → WCAG 1.4.11 (AA)</a:t>
+              <a:t>[Média] Alvos de toque abaixo do mínimo → WCAG 2.5.8 (AA, WCAG 2.2)</a:t>
             </a:r>
           </a:p>
           <a:p>
@@ -14081,7 +14068,7 @@
               <a:rPr sz="1500">
                 <a:latin typeface="Arial"/>
               </a:rPr>
-              <a:t>[Média] Alvos de toque abaixo do mínimo → WCAG 2.5.8 (AA)</a:t>
+              <a:t>[Média] Layout quebra com espaçamento de texto ampliado → WCAG 1.4.12 (AA)</a:t>
             </a:r>
           </a:p>
         </p:txBody>
@@ -15436,7 +15423,7 @@
               <a:rPr sz="1500">
                 <a:latin typeface="Arial"/>
               </a:rPr>
-              <a:t>axe-core 4.10.2 (Deque) — motor usado pelas extensões WAVE e Lighthouse</a:t>
+              <a:t>axe-core 4.10.2 (Deque) — motor usado pelo Lighthouse</a:t>
             </a:r>
           </a:p>
           <a:p>

--- a/apresentacao/APRESENTACAO_AVALIACAO_ACESSIBILIDADE.pptx
+++ b/apresentacao/APRESENTACAO_AVALIACAO_ACESSIBILIDADE.pptx
@@ -13298,7 +13298,7 @@
               <a:rPr sz="1300">
                 <a:latin typeface="Arial"/>
               </a:rPr>
-              <a:t>O tradutor de Libras existe em todas as páginas, injetado por barra.brasil.gov.br. Não aparece no HTML entregue pelo servidor e escapou às três frentes automatizadas — mas a página de Acessibilidade do portal nunca o menciona.</a:t>
+              <a:t>O tradutor de Libras existe em todas as páginas, injetado por barra.brasil.gov.br. Não aparece no HTML entregue pelo servidor e escapou a todas as frentes automatizadas — mas a página de Acessibilidade do portal nunca o menciona.</a:t>
             </a:r>
           </a:p>
         </p:txBody>
@@ -13875,7 +13875,7 @@
               <a:rPr sz="1700">
                 <a:latin typeface="Arial"/>
               </a:rPr>
-              <a:t>Falhas em critérios de Nível AA: 1.4.3 Contraste mínimo (3 reprovações confirmadas por amostragem de pixels, a pior em 1,66:1); 1.4.11 Contraste não textual (indicador de foco de 2 px na cor rgb(241,202,127), que atinge apenas 1,56:1 sobre o fundo branco da área de conteúdo, onde exige-se 3:1); e 1.4.12 Espaçamento de texto (3 elementos com conteúdo cortado sob o espaçamento exigido pelo critério). Acrescenta-se o critério 2.5.8 Tamanho do alvo (mínimo), que mede 23 dos 58 alvos interativos da versão móvel abaixo de 24 por 24 pixels: ele pertence à WCAG 2.2, e não à 2.1, e é aqui adotado como complemento, conforme facultado pelo enunciado do trabalho ao admitir "WCAG 2.1 ou mais recentes". Na WCAG 2.1 o requisito equivalente é o 2.5.5 Tamanho do alvo, de Nível AAA, que o sítio também não cumpre. O critério 1.4.10 Reflow, registrado como falho na primeira medição, foi reclassificado como atendido — ver a nota de reconferência.</a:t>
+              <a:t>Falhas em critérios de Nível AA: 1.4.3 Contraste mínimo (3 reprovações confirmadas por amostragem de pixels, a pior em 1,66:1); 1.4.11 Contraste não textual (indicador de foco de 2 px na cor rgb(241,202,127), que atinge apenas 1,56:1 sobre o fundo branco da área de conteúdo, onde exige-se 3:1); e 1.4.12 Espaçamento de texto (3 elementos com conteúdo cortado sob o espaçamento exigido pelo critério). Acrescenta-se o critério 2.5.8 Tamanho do alvo (mínimo), que mede 23 dos 58 alvos interativos da versão móvel abaixo de 24 por 24 pixels: ele pertence à WCAG 2.2, e não à 2.1, e é aqui adotado como complemento, conforme facultado pelo enunciado do trabalho ao admitir "WCAG 2.1 ou mais recentes". Na WCAG 2.1 o requisito equivalente é o 2.5.5 Tamanho do alvo, de Nível AAA, que o sítio também não cumpre. O critério 1.4.10 Reflow, registrado como falho na primeira medição, foi reclassificado como atendido — ver, ao fim desta seção, a nota de reconferência.</a:t>
             </a:r>
           </a:p>
           <a:p>
@@ -14705,7 +14705,7 @@
               <a:rPr sz="1400">
                 <a:latin typeface="Arial"/>
               </a:rPr>
-              <a:t>Trata-se de um sítio institucional público, de escopo reduzido e navegação simples (página inicial, noticias, editais e contato), o que permite auditar integralmente o conjunto de páginas dentro do prazo do trabalho. Por pertencer a administração pública federal, esta sujeito ao Decreto n. 5.296/2004, a Lei Brasileira de Inclusão (Lei n. 13.146/2015) e ao eMAG 3.1, o que torna a avaliação juridica</a:t>
+              <a:t>Trata-se de um sítio institucional público, de escopo reduzido e navegação simples (página inicial, notícias, editais e contato), o que permite auditar integralmente o conjunto de páginas dentro do prazo do trabalho. Por pertencer à administração pública federal, está sujeito ao Decreto n. 5.296/2004, à Lei Brasileira de Inclusão (Lei n. 13.146/2015) e ao eMAG 3.1, o que torna a avaliação juridica</a:t>
             </a:r>
           </a:p>
         </p:txBody>
